--- a/宣道詩/(宣道詩55)我今來就十字架.pptx
+++ b/宣道詩/(宣道詩55)我今來就十字架.pptx
@@ -5,14 +5,23 @@
     <p:sldMasterId id="2147483660" r:id="rId1"/>
   </p:sldMasterIdLst>
   <p:sldIdLst>
-    <p:sldId id="256" r:id="rId2"/>
-    <p:sldId id="257" r:id="rId3"/>
-    <p:sldId id="258" r:id="rId4"/>
-    <p:sldId id="259" r:id="rId5"/>
-    <p:sldId id="260" r:id="rId6"/>
-    <p:sldId id="261" r:id="rId7"/>
-    <p:sldId id="262" r:id="rId8"/>
-    <p:sldId id="263" r:id="rId9"/>
+    <p:sldId id="516" r:id="rId2"/>
+    <p:sldId id="517" r:id="rId3"/>
+    <p:sldId id="518" r:id="rId4"/>
+    <p:sldId id="519" r:id="rId5"/>
+    <p:sldId id="520" r:id="rId6"/>
+    <p:sldId id="521" r:id="rId7"/>
+    <p:sldId id="522" r:id="rId8"/>
+    <p:sldId id="527" r:id="rId9"/>
+    <p:sldId id="528" r:id="rId10"/>
+    <p:sldId id="523" r:id="rId11"/>
+    <p:sldId id="524" r:id="rId12"/>
+    <p:sldId id="529" r:id="rId13"/>
+    <p:sldId id="530" r:id="rId14"/>
+    <p:sldId id="525" r:id="rId15"/>
+    <p:sldId id="526" r:id="rId16"/>
+    <p:sldId id="531" r:id="rId17"/>
+    <p:sldId id="532" r:id="rId18"/>
   </p:sldIdLst>
   <p:sldSz cx="12192000" cy="6858000"/>
   <p:notesSz cx="6858000" cy="9144000"/>
@@ -168,10 +177,9 @@
           <a:lstStyle/>
           <a:p>
             <a:r>
-              <a:rPr lang="zh-TW" altLang="en-US" smtClean="0"/>
+              <a:rPr lang="zh-TW" altLang="en-US"/>
               <a:t>按一下以編輯母片標題樣式</a:t>
             </a:r>
-            <a:endParaRPr lang="zh-TW" altLang="en-US"/>
           </a:p>
         </p:txBody>
       </p:sp>
@@ -287,10 +295,9 @@
           </a:lstStyle>
           <a:p>
             <a:r>
-              <a:rPr lang="zh-TW" altLang="en-US" smtClean="0"/>
+              <a:rPr lang="zh-TW" altLang="en-US"/>
               <a:t>按一下以編輯母片副標題樣式</a:t>
             </a:r>
-            <a:endParaRPr lang="zh-TW" altLang="en-US"/>
           </a:p>
         </p:txBody>
       </p:sp>
@@ -311,7 +318,7 @@
           <a:p>
             <a:fld id="{3946B921-FFAD-4FCE-8089-01706DD586D2}" type="datetimeFigureOut">
               <a:rPr lang="zh-TW" altLang="en-US" smtClean="0"/>
-              <a:t>2020/8/1</a:t>
+              <a:t>2024/4/6</a:t>
             </a:fld>
             <a:endParaRPr lang="zh-TW" altLang="en-US"/>
           </a:p>
@@ -400,10 +407,9 @@
           <a:lstStyle/>
           <a:p>
             <a:r>
-              <a:rPr lang="zh-TW" altLang="en-US" smtClean="0"/>
+              <a:rPr lang="zh-TW" altLang="en-US"/>
               <a:t>按一下以編輯母片標題樣式</a:t>
             </a:r>
-            <a:endParaRPr lang="zh-TW" altLang="en-US"/>
           </a:p>
         </p:txBody>
       </p:sp>
@@ -424,38 +430,37 @@
           <a:p>
             <a:pPr lvl="0"/>
             <a:r>
-              <a:rPr lang="zh-TW" altLang="en-US" smtClean="0"/>
+              <a:rPr lang="zh-TW" altLang="en-US"/>
               <a:t>按一下以編輯母片文字樣式</a:t>
             </a:r>
           </a:p>
           <a:p>
             <a:pPr lvl="1"/>
             <a:r>
-              <a:rPr lang="zh-TW" altLang="en-US" smtClean="0"/>
+              <a:rPr lang="zh-TW" altLang="en-US"/>
               <a:t>第二層</a:t>
             </a:r>
           </a:p>
           <a:p>
             <a:pPr lvl="2"/>
             <a:r>
-              <a:rPr lang="zh-TW" altLang="en-US" smtClean="0"/>
+              <a:rPr lang="zh-TW" altLang="en-US"/>
               <a:t>第三層</a:t>
             </a:r>
           </a:p>
           <a:p>
             <a:pPr lvl="3"/>
             <a:r>
-              <a:rPr lang="zh-TW" altLang="en-US" smtClean="0"/>
+              <a:rPr lang="zh-TW" altLang="en-US"/>
               <a:t>第四層</a:t>
             </a:r>
           </a:p>
           <a:p>
             <a:pPr lvl="4"/>
             <a:r>
-              <a:rPr lang="zh-TW" altLang="en-US" smtClean="0"/>
+              <a:rPr lang="zh-TW" altLang="en-US"/>
               <a:t>第五層</a:t>
             </a:r>
-            <a:endParaRPr lang="zh-TW" altLang="en-US"/>
           </a:p>
         </p:txBody>
       </p:sp>
@@ -476,7 +481,7 @@
           <a:p>
             <a:fld id="{3946B921-FFAD-4FCE-8089-01706DD586D2}" type="datetimeFigureOut">
               <a:rPr lang="zh-TW" altLang="en-US" smtClean="0"/>
-              <a:t>2020/8/1</a:t>
+              <a:t>2024/4/6</a:t>
             </a:fld>
             <a:endParaRPr lang="zh-TW" altLang="en-US"/>
           </a:p>
@@ -570,10 +575,9 @@
           <a:lstStyle/>
           <a:p>
             <a:r>
-              <a:rPr lang="zh-TW" altLang="en-US" smtClean="0"/>
+              <a:rPr lang="zh-TW" altLang="en-US"/>
               <a:t>按一下以編輯母片標題樣式</a:t>
             </a:r>
-            <a:endParaRPr lang="zh-TW" altLang="en-US"/>
           </a:p>
         </p:txBody>
       </p:sp>
@@ -599,38 +603,37 @@
           <a:p>
             <a:pPr lvl="0"/>
             <a:r>
-              <a:rPr lang="zh-TW" altLang="en-US" smtClean="0"/>
+              <a:rPr lang="zh-TW" altLang="en-US"/>
               <a:t>按一下以編輯母片文字樣式</a:t>
             </a:r>
           </a:p>
           <a:p>
             <a:pPr lvl="1"/>
             <a:r>
-              <a:rPr lang="zh-TW" altLang="en-US" smtClean="0"/>
+              <a:rPr lang="zh-TW" altLang="en-US"/>
               <a:t>第二層</a:t>
             </a:r>
           </a:p>
           <a:p>
             <a:pPr lvl="2"/>
             <a:r>
-              <a:rPr lang="zh-TW" altLang="en-US" smtClean="0"/>
+              <a:rPr lang="zh-TW" altLang="en-US"/>
               <a:t>第三層</a:t>
             </a:r>
           </a:p>
           <a:p>
             <a:pPr lvl="3"/>
             <a:r>
-              <a:rPr lang="zh-TW" altLang="en-US" smtClean="0"/>
+              <a:rPr lang="zh-TW" altLang="en-US"/>
               <a:t>第四層</a:t>
             </a:r>
           </a:p>
           <a:p>
             <a:pPr lvl="4"/>
             <a:r>
-              <a:rPr lang="zh-TW" altLang="en-US" smtClean="0"/>
+              <a:rPr lang="zh-TW" altLang="en-US"/>
               <a:t>第五層</a:t>
             </a:r>
-            <a:endParaRPr lang="zh-TW" altLang="en-US"/>
           </a:p>
         </p:txBody>
       </p:sp>
@@ -651,7 +654,7 @@
           <a:p>
             <a:fld id="{3946B921-FFAD-4FCE-8089-01706DD586D2}" type="datetimeFigureOut">
               <a:rPr lang="zh-TW" altLang="en-US" smtClean="0"/>
-              <a:t>2020/8/1</a:t>
+              <a:t>2024/4/6</a:t>
             </a:fld>
             <a:endParaRPr lang="zh-TW" altLang="en-US"/>
           </a:p>
@@ -740,10 +743,9 @@
           <a:lstStyle/>
           <a:p>
             <a:r>
-              <a:rPr lang="zh-TW" altLang="en-US" smtClean="0"/>
+              <a:rPr lang="zh-TW" altLang="en-US"/>
               <a:t>按一下以編輯母片標題樣式</a:t>
             </a:r>
-            <a:endParaRPr lang="zh-TW" altLang="en-US"/>
           </a:p>
         </p:txBody>
       </p:sp>
@@ -764,38 +766,37 @@
           <a:p>
             <a:pPr lvl="0"/>
             <a:r>
-              <a:rPr lang="zh-TW" altLang="en-US" smtClean="0"/>
+              <a:rPr lang="zh-TW" altLang="en-US"/>
               <a:t>按一下以編輯母片文字樣式</a:t>
             </a:r>
           </a:p>
           <a:p>
             <a:pPr lvl="1"/>
             <a:r>
-              <a:rPr lang="zh-TW" altLang="en-US" smtClean="0"/>
+              <a:rPr lang="zh-TW" altLang="en-US"/>
               <a:t>第二層</a:t>
             </a:r>
           </a:p>
           <a:p>
             <a:pPr lvl="2"/>
             <a:r>
-              <a:rPr lang="zh-TW" altLang="en-US" smtClean="0"/>
+              <a:rPr lang="zh-TW" altLang="en-US"/>
               <a:t>第三層</a:t>
             </a:r>
           </a:p>
           <a:p>
             <a:pPr lvl="3"/>
             <a:r>
-              <a:rPr lang="zh-TW" altLang="en-US" smtClean="0"/>
+              <a:rPr lang="zh-TW" altLang="en-US"/>
               <a:t>第四層</a:t>
             </a:r>
           </a:p>
           <a:p>
             <a:pPr lvl="4"/>
             <a:r>
-              <a:rPr lang="zh-TW" altLang="en-US" smtClean="0"/>
+              <a:rPr lang="zh-TW" altLang="en-US"/>
               <a:t>第五層</a:t>
             </a:r>
-            <a:endParaRPr lang="zh-TW" altLang="en-US"/>
           </a:p>
         </p:txBody>
       </p:sp>
@@ -816,7 +817,7 @@
           <a:p>
             <a:fld id="{3946B921-FFAD-4FCE-8089-01706DD586D2}" type="datetimeFigureOut">
               <a:rPr lang="zh-TW" altLang="en-US" smtClean="0"/>
-              <a:t>2020/8/1</a:t>
+              <a:t>2024/4/6</a:t>
             </a:fld>
             <a:endParaRPr lang="zh-TW" altLang="en-US"/>
           </a:p>
@@ -914,10 +915,9 @@
           </a:lstStyle>
           <a:p>
             <a:r>
-              <a:rPr lang="zh-TW" altLang="en-US" smtClean="0"/>
+              <a:rPr lang="zh-TW" altLang="en-US"/>
               <a:t>按一下以編輯母片標題樣式</a:t>
             </a:r>
-            <a:endParaRPr lang="zh-TW" altLang="en-US"/>
           </a:p>
         </p:txBody>
       </p:sp>
@@ -1034,7 +1034,7 @@
           <a:p>
             <a:pPr lvl="0"/>
             <a:r>
-              <a:rPr lang="zh-TW" altLang="en-US" smtClean="0"/>
+              <a:rPr lang="zh-TW" altLang="en-US"/>
               <a:t>按一下以編輯母片文字樣式</a:t>
             </a:r>
           </a:p>
@@ -1057,7 +1057,7 @@
           <a:p>
             <a:fld id="{3946B921-FFAD-4FCE-8089-01706DD586D2}" type="datetimeFigureOut">
               <a:rPr lang="zh-TW" altLang="en-US" smtClean="0"/>
-              <a:t>2020/8/1</a:t>
+              <a:t>2024/4/6</a:t>
             </a:fld>
             <a:endParaRPr lang="zh-TW" altLang="en-US"/>
           </a:p>
@@ -1146,10 +1146,9 @@
           <a:lstStyle/>
           <a:p>
             <a:r>
-              <a:rPr lang="zh-TW" altLang="en-US" smtClean="0"/>
+              <a:rPr lang="zh-TW" altLang="en-US"/>
               <a:t>按一下以編輯母片標題樣式</a:t>
             </a:r>
-            <a:endParaRPr lang="zh-TW" altLang="en-US"/>
           </a:p>
         </p:txBody>
       </p:sp>
@@ -1203,38 +1202,37 @@
           <a:p>
             <a:pPr lvl="0"/>
             <a:r>
-              <a:rPr lang="zh-TW" altLang="en-US" smtClean="0"/>
+              <a:rPr lang="zh-TW" altLang="en-US"/>
               <a:t>按一下以編輯母片文字樣式</a:t>
             </a:r>
           </a:p>
           <a:p>
             <a:pPr lvl="1"/>
             <a:r>
-              <a:rPr lang="zh-TW" altLang="en-US" smtClean="0"/>
+              <a:rPr lang="zh-TW" altLang="en-US"/>
               <a:t>第二層</a:t>
             </a:r>
           </a:p>
           <a:p>
             <a:pPr lvl="2"/>
             <a:r>
-              <a:rPr lang="zh-TW" altLang="en-US" smtClean="0"/>
+              <a:rPr lang="zh-TW" altLang="en-US"/>
               <a:t>第三層</a:t>
             </a:r>
           </a:p>
           <a:p>
             <a:pPr lvl="3"/>
             <a:r>
-              <a:rPr lang="zh-TW" altLang="en-US" smtClean="0"/>
+              <a:rPr lang="zh-TW" altLang="en-US"/>
               <a:t>第四層</a:t>
             </a:r>
           </a:p>
           <a:p>
             <a:pPr lvl="4"/>
             <a:r>
-              <a:rPr lang="zh-TW" altLang="en-US" smtClean="0"/>
+              <a:rPr lang="zh-TW" altLang="en-US"/>
               <a:t>第五層</a:t>
             </a:r>
-            <a:endParaRPr lang="zh-TW" altLang="en-US"/>
           </a:p>
         </p:txBody>
       </p:sp>
@@ -1288,38 +1286,37 @@
           <a:p>
             <a:pPr lvl="0"/>
             <a:r>
-              <a:rPr lang="zh-TW" altLang="en-US" smtClean="0"/>
+              <a:rPr lang="zh-TW" altLang="en-US"/>
               <a:t>按一下以編輯母片文字樣式</a:t>
             </a:r>
           </a:p>
           <a:p>
             <a:pPr lvl="1"/>
             <a:r>
-              <a:rPr lang="zh-TW" altLang="en-US" smtClean="0"/>
+              <a:rPr lang="zh-TW" altLang="en-US"/>
               <a:t>第二層</a:t>
             </a:r>
           </a:p>
           <a:p>
             <a:pPr lvl="2"/>
             <a:r>
-              <a:rPr lang="zh-TW" altLang="en-US" smtClean="0"/>
+              <a:rPr lang="zh-TW" altLang="en-US"/>
               <a:t>第三層</a:t>
             </a:r>
           </a:p>
           <a:p>
             <a:pPr lvl="3"/>
             <a:r>
-              <a:rPr lang="zh-TW" altLang="en-US" smtClean="0"/>
+              <a:rPr lang="zh-TW" altLang="en-US"/>
               <a:t>第四層</a:t>
             </a:r>
           </a:p>
           <a:p>
             <a:pPr lvl="4"/>
             <a:r>
-              <a:rPr lang="zh-TW" altLang="en-US" smtClean="0"/>
+              <a:rPr lang="zh-TW" altLang="en-US"/>
               <a:t>第五層</a:t>
             </a:r>
-            <a:endParaRPr lang="zh-TW" altLang="en-US"/>
           </a:p>
         </p:txBody>
       </p:sp>
@@ -1340,7 +1337,7 @@
           <a:p>
             <a:fld id="{3946B921-FFAD-4FCE-8089-01706DD586D2}" type="datetimeFigureOut">
               <a:rPr lang="zh-TW" altLang="en-US" smtClean="0"/>
-              <a:t>2020/8/1</a:t>
+              <a:t>2024/4/6</a:t>
             </a:fld>
             <a:endParaRPr lang="zh-TW" altLang="en-US"/>
           </a:p>
@@ -1433,10 +1430,9 @@
           </a:lstStyle>
           <a:p>
             <a:r>
-              <a:rPr lang="zh-TW" altLang="en-US" smtClean="0"/>
+              <a:rPr lang="zh-TW" altLang="en-US"/>
               <a:t>按一下以編輯母片標題樣式</a:t>
             </a:r>
-            <a:endParaRPr lang="zh-TW" altLang="en-US"/>
           </a:p>
         </p:txBody>
       </p:sp>
@@ -1499,7 +1495,7 @@
           <a:p>
             <a:pPr lvl="0"/>
             <a:r>
-              <a:rPr lang="zh-TW" altLang="en-US" smtClean="0"/>
+              <a:rPr lang="zh-TW" altLang="en-US"/>
               <a:t>按一下以編輯母片文字樣式</a:t>
             </a:r>
           </a:p>
@@ -1555,38 +1551,37 @@
           <a:p>
             <a:pPr lvl="0"/>
             <a:r>
-              <a:rPr lang="zh-TW" altLang="en-US" smtClean="0"/>
+              <a:rPr lang="zh-TW" altLang="en-US"/>
               <a:t>按一下以編輯母片文字樣式</a:t>
             </a:r>
           </a:p>
           <a:p>
             <a:pPr lvl="1"/>
             <a:r>
-              <a:rPr lang="zh-TW" altLang="en-US" smtClean="0"/>
+              <a:rPr lang="zh-TW" altLang="en-US"/>
               <a:t>第二層</a:t>
             </a:r>
           </a:p>
           <a:p>
             <a:pPr lvl="2"/>
             <a:r>
-              <a:rPr lang="zh-TW" altLang="en-US" smtClean="0"/>
+              <a:rPr lang="zh-TW" altLang="en-US"/>
               <a:t>第三層</a:t>
             </a:r>
           </a:p>
           <a:p>
             <a:pPr lvl="3"/>
             <a:r>
-              <a:rPr lang="zh-TW" altLang="en-US" smtClean="0"/>
+              <a:rPr lang="zh-TW" altLang="en-US"/>
               <a:t>第四層</a:t>
             </a:r>
           </a:p>
           <a:p>
             <a:pPr lvl="4"/>
             <a:r>
-              <a:rPr lang="zh-TW" altLang="en-US" smtClean="0"/>
+              <a:rPr lang="zh-TW" altLang="en-US"/>
               <a:t>第五層</a:t>
             </a:r>
-            <a:endParaRPr lang="zh-TW" altLang="en-US"/>
           </a:p>
         </p:txBody>
       </p:sp>
@@ -1649,7 +1644,7 @@
           <a:p>
             <a:pPr lvl="0"/>
             <a:r>
-              <a:rPr lang="zh-TW" altLang="en-US" smtClean="0"/>
+              <a:rPr lang="zh-TW" altLang="en-US"/>
               <a:t>按一下以編輯母片文字樣式</a:t>
             </a:r>
           </a:p>
@@ -1705,38 +1700,37 @@
           <a:p>
             <a:pPr lvl="0"/>
             <a:r>
-              <a:rPr lang="zh-TW" altLang="en-US" smtClean="0"/>
+              <a:rPr lang="zh-TW" altLang="en-US"/>
               <a:t>按一下以編輯母片文字樣式</a:t>
             </a:r>
           </a:p>
           <a:p>
             <a:pPr lvl="1"/>
             <a:r>
-              <a:rPr lang="zh-TW" altLang="en-US" smtClean="0"/>
+              <a:rPr lang="zh-TW" altLang="en-US"/>
               <a:t>第二層</a:t>
             </a:r>
           </a:p>
           <a:p>
             <a:pPr lvl="2"/>
             <a:r>
-              <a:rPr lang="zh-TW" altLang="en-US" smtClean="0"/>
+              <a:rPr lang="zh-TW" altLang="en-US"/>
               <a:t>第三層</a:t>
             </a:r>
           </a:p>
           <a:p>
             <a:pPr lvl="3"/>
             <a:r>
-              <a:rPr lang="zh-TW" altLang="en-US" smtClean="0"/>
+              <a:rPr lang="zh-TW" altLang="en-US"/>
               <a:t>第四層</a:t>
             </a:r>
           </a:p>
           <a:p>
             <a:pPr lvl="4"/>
             <a:r>
-              <a:rPr lang="zh-TW" altLang="en-US" smtClean="0"/>
+              <a:rPr lang="zh-TW" altLang="en-US"/>
               <a:t>第五層</a:t>
             </a:r>
-            <a:endParaRPr lang="zh-TW" altLang="en-US"/>
           </a:p>
         </p:txBody>
       </p:sp>
@@ -1757,7 +1751,7 @@
           <a:p>
             <a:fld id="{3946B921-FFAD-4FCE-8089-01706DD586D2}" type="datetimeFigureOut">
               <a:rPr lang="zh-TW" altLang="en-US" smtClean="0"/>
-              <a:t>2020/8/1</a:t>
+              <a:t>2024/4/6</a:t>
             </a:fld>
             <a:endParaRPr lang="zh-TW" altLang="en-US"/>
           </a:p>
@@ -1846,10 +1840,9 @@
           <a:lstStyle/>
           <a:p>
             <a:r>
-              <a:rPr lang="zh-TW" altLang="en-US" smtClean="0"/>
+              <a:rPr lang="zh-TW" altLang="en-US"/>
               <a:t>按一下以編輯母片標題樣式</a:t>
             </a:r>
-            <a:endParaRPr lang="zh-TW" altLang="en-US"/>
           </a:p>
         </p:txBody>
       </p:sp>
@@ -1870,7 +1863,7 @@
           <a:p>
             <a:fld id="{3946B921-FFAD-4FCE-8089-01706DD586D2}" type="datetimeFigureOut">
               <a:rPr lang="zh-TW" altLang="en-US" smtClean="0"/>
-              <a:t>2020/8/1</a:t>
+              <a:t>2024/4/6</a:t>
             </a:fld>
             <a:endParaRPr lang="zh-TW" altLang="en-US"/>
           </a:p>
@@ -1960,7 +1953,7 @@
           <a:p>
             <a:fld id="{3946B921-FFAD-4FCE-8089-01706DD586D2}" type="datetimeFigureOut">
               <a:rPr lang="zh-TW" altLang="en-US" smtClean="0"/>
-              <a:t>2020/8/1</a:t>
+              <a:t>2024/4/6</a:t>
             </a:fld>
             <a:endParaRPr lang="zh-TW" altLang="en-US"/>
           </a:p>
@@ -2058,10 +2051,9 @@
           </a:lstStyle>
           <a:p>
             <a:r>
-              <a:rPr lang="zh-TW" altLang="en-US" smtClean="0"/>
+              <a:rPr lang="zh-TW" altLang="en-US"/>
               <a:t>按一下以編輯母片標題樣式</a:t>
             </a:r>
-            <a:endParaRPr lang="zh-TW" altLang="en-US"/>
           </a:p>
         </p:txBody>
       </p:sp>
@@ -2115,38 +2107,37 @@
           <a:p>
             <a:pPr lvl="0"/>
             <a:r>
-              <a:rPr lang="zh-TW" altLang="en-US" smtClean="0"/>
+              <a:rPr lang="zh-TW" altLang="en-US"/>
               <a:t>按一下以編輯母片文字樣式</a:t>
             </a:r>
           </a:p>
           <a:p>
             <a:pPr lvl="1"/>
             <a:r>
-              <a:rPr lang="zh-TW" altLang="en-US" smtClean="0"/>
+              <a:rPr lang="zh-TW" altLang="en-US"/>
               <a:t>第二層</a:t>
             </a:r>
           </a:p>
           <a:p>
             <a:pPr lvl="2"/>
             <a:r>
-              <a:rPr lang="zh-TW" altLang="en-US" smtClean="0"/>
+              <a:rPr lang="zh-TW" altLang="en-US"/>
               <a:t>第三層</a:t>
             </a:r>
           </a:p>
           <a:p>
             <a:pPr lvl="3"/>
             <a:r>
-              <a:rPr lang="zh-TW" altLang="en-US" smtClean="0"/>
+              <a:rPr lang="zh-TW" altLang="en-US"/>
               <a:t>第四層</a:t>
             </a:r>
           </a:p>
           <a:p>
             <a:pPr lvl="4"/>
             <a:r>
-              <a:rPr lang="zh-TW" altLang="en-US" smtClean="0"/>
+              <a:rPr lang="zh-TW" altLang="en-US"/>
               <a:t>第五層</a:t>
             </a:r>
-            <a:endParaRPr lang="zh-TW" altLang="en-US"/>
           </a:p>
         </p:txBody>
       </p:sp>
@@ -2209,7 +2200,7 @@
           <a:p>
             <a:pPr lvl="0"/>
             <a:r>
-              <a:rPr lang="zh-TW" altLang="en-US" smtClean="0"/>
+              <a:rPr lang="zh-TW" altLang="en-US"/>
               <a:t>按一下以編輯母片文字樣式</a:t>
             </a:r>
           </a:p>
@@ -2232,7 +2223,7 @@
           <a:p>
             <a:fld id="{3946B921-FFAD-4FCE-8089-01706DD586D2}" type="datetimeFigureOut">
               <a:rPr lang="zh-TW" altLang="en-US" smtClean="0"/>
-              <a:t>2020/8/1</a:t>
+              <a:t>2024/4/6</a:t>
             </a:fld>
             <a:endParaRPr lang="zh-TW" altLang="en-US"/>
           </a:p>
@@ -2330,10 +2321,9 @@
           </a:lstStyle>
           <a:p>
             <a:r>
-              <a:rPr lang="zh-TW" altLang="en-US" smtClean="0"/>
+              <a:rPr lang="zh-TW" altLang="en-US"/>
               <a:t>按一下以編輯母片標題樣式</a:t>
             </a:r>
-            <a:endParaRPr lang="zh-TW" altLang="en-US"/>
           </a:p>
         </p:txBody>
       </p:sp>
@@ -2395,10 +2385,9 @@
           </a:lstStyle>
           <a:p>
             <a:r>
-              <a:rPr lang="zh-TW" altLang="en-US" smtClean="0"/>
+              <a:rPr lang="zh-TW" altLang="en-US"/>
               <a:t>按一下圖示以新增圖片</a:t>
             </a:r>
-            <a:endParaRPr lang="zh-TW" altLang="en-US"/>
           </a:p>
         </p:txBody>
       </p:sp>
@@ -2461,7 +2450,7 @@
           <a:p>
             <a:pPr lvl="0"/>
             <a:r>
-              <a:rPr lang="zh-TW" altLang="en-US" smtClean="0"/>
+              <a:rPr lang="zh-TW" altLang="en-US"/>
               <a:t>按一下以編輯母片文字樣式</a:t>
             </a:r>
           </a:p>
@@ -2484,7 +2473,7 @@
           <a:p>
             <a:fld id="{3946B921-FFAD-4FCE-8089-01706DD586D2}" type="datetimeFigureOut">
               <a:rPr lang="zh-TW" altLang="en-US" smtClean="0"/>
-              <a:t>2020/8/1</a:t>
+              <a:t>2024/4/6</a:t>
             </a:fld>
             <a:endParaRPr lang="zh-TW" altLang="en-US"/>
           </a:p>
@@ -2593,10 +2582,9 @@
           <a:lstStyle/>
           <a:p>
             <a:r>
-              <a:rPr lang="zh-TW" altLang="en-US" smtClean="0"/>
+              <a:rPr lang="zh-TW" altLang="en-US"/>
               <a:t>按一下以編輯母片標題樣式</a:t>
             </a:r>
-            <a:endParaRPr lang="zh-TW" altLang="en-US"/>
           </a:p>
         </p:txBody>
       </p:sp>
@@ -2627,38 +2615,37 @@
           <a:p>
             <a:pPr lvl="0"/>
             <a:r>
-              <a:rPr lang="zh-TW" altLang="en-US" smtClean="0"/>
+              <a:rPr lang="zh-TW" altLang="en-US"/>
               <a:t>按一下以編輯母片文字樣式</a:t>
             </a:r>
           </a:p>
           <a:p>
             <a:pPr lvl="1"/>
             <a:r>
-              <a:rPr lang="zh-TW" altLang="en-US" smtClean="0"/>
+              <a:rPr lang="zh-TW" altLang="en-US"/>
               <a:t>第二層</a:t>
             </a:r>
           </a:p>
           <a:p>
             <a:pPr lvl="2"/>
             <a:r>
-              <a:rPr lang="zh-TW" altLang="en-US" smtClean="0"/>
+              <a:rPr lang="zh-TW" altLang="en-US"/>
               <a:t>第三層</a:t>
             </a:r>
           </a:p>
           <a:p>
             <a:pPr lvl="3"/>
             <a:r>
-              <a:rPr lang="zh-TW" altLang="en-US" smtClean="0"/>
+              <a:rPr lang="zh-TW" altLang="en-US"/>
               <a:t>第四層</a:t>
             </a:r>
           </a:p>
           <a:p>
             <a:pPr lvl="4"/>
             <a:r>
-              <a:rPr lang="zh-TW" altLang="en-US" smtClean="0"/>
+              <a:rPr lang="zh-TW" altLang="en-US"/>
               <a:t>第五層</a:t>
             </a:r>
-            <a:endParaRPr lang="zh-TW" altLang="en-US"/>
           </a:p>
         </p:txBody>
       </p:sp>
@@ -2697,7 +2684,7 @@
           <a:p>
             <a:fld id="{3946B921-FFAD-4FCE-8089-01706DD586D2}" type="datetimeFigureOut">
               <a:rPr lang="zh-TW" altLang="en-US" smtClean="0"/>
-              <a:t>2020/8/1</a:t>
+              <a:t>2024/4/6</a:t>
             </a:fld>
             <a:endParaRPr lang="zh-TW" altLang="en-US"/>
           </a:p>
@@ -3077,24 +3064,168 @@
             <p:ph type="title"/>
           </p:nvPr>
         </p:nvSpPr>
-        <p:spPr/>
+        <p:spPr>
+          <a:xfrm>
+            <a:off x="0" y="2660915"/>
+            <a:ext cx="12192000" cy="1143000"/>
+          </a:xfrm>
+        </p:spPr>
         <p:txBody>
           <a:bodyPr>
-            <a:normAutofit/>
+            <a:noAutofit/>
           </a:bodyPr>
           <a:lstStyle/>
           <a:p>
             <a:r>
-              <a:rPr lang="zh-CN" altLang="en-US" sz="4800" b="1" dirty="0" smtClean="0">
+              <a:rPr lang="zh-CN" altLang="en-US" sz="5333" b="1" u="sng" dirty="0">
+                <a:solidFill>
+                  <a:srgbClr val="660033"/>
+                </a:solidFill>
+                <a:effectLst>
+                  <a:outerShdw blurRad="38100" dist="38100" dir="2700000" algn="tl">
+                    <a:srgbClr val="000000">
+                      <a:alpha val="43137"/>
+                    </a:srgbClr>
+                  </a:outerShdw>
+                </a:effectLst>
+                <a:latin typeface="微軟正黑體" pitchFamily="34" charset="-120"/>
+                <a:ea typeface="微軟正黑體" pitchFamily="34" charset="-120"/>
+              </a:rPr>
+              <a:t>宣道詩 </a:t>
+            </a:r>
+            <a:r>
+              <a:rPr lang="en-US" altLang="zh-CN" sz="5333" b="1" u="sng" dirty="0">
+                <a:solidFill>
+                  <a:srgbClr val="660033"/>
+                </a:solidFill>
+                <a:effectLst>
+                  <a:outerShdw blurRad="38100" dist="38100" dir="2700000" algn="tl">
+                    <a:srgbClr val="000000">
+                      <a:alpha val="43137"/>
+                    </a:srgbClr>
+                  </a:outerShdw>
+                </a:effectLst>
+                <a:latin typeface="微軟正黑體" pitchFamily="34" charset="-120"/>
+                <a:ea typeface="微軟正黑體" pitchFamily="34" charset="-120"/>
+              </a:rPr>
+              <a:t>55</a:t>
+            </a:r>
+            <a:br>
+              <a:rPr lang="en-US" altLang="zh-CN" sz="7200" b="1" i="1" dirty="0">
+                <a:solidFill>
+                  <a:srgbClr val="660033"/>
+                </a:solidFill>
+                <a:effectLst>
+                  <a:outerShdw blurRad="38100" dist="38100" dir="2700000" algn="tl">
+                    <a:srgbClr val="000000">
+                      <a:alpha val="43137"/>
+                    </a:srgbClr>
+                  </a:outerShdw>
+                </a:effectLst>
+                <a:latin typeface="微軟正黑體" pitchFamily="34" charset="-120"/>
+                <a:ea typeface="微軟正黑體" pitchFamily="34" charset="-120"/>
+              </a:rPr>
+            </a:br>
+            <a:r>
+              <a:rPr lang="zh-CN" altLang="en-US" sz="8000" b="1" dirty="0">
                 <a:solidFill>
                   <a:srgbClr val="000066"/>
                 </a:solidFill>
+                <a:effectLst>
+                  <a:outerShdw blurRad="38100" dist="38100" dir="2700000" algn="tl">
+                    <a:srgbClr val="000000">
+                      <a:alpha val="43137"/>
+                    </a:srgbClr>
+                  </a:outerShdw>
+                </a:effectLst>
                 <a:latin typeface="微軟正黑體" pitchFamily="34" charset="-120"/>
                 <a:ea typeface="微軟正黑體" pitchFamily="34" charset="-120"/>
               </a:rPr>
               <a:t>我今來就十字架</a:t>
             </a:r>
-            <a:endParaRPr lang="zh-TW" altLang="en-US" sz="4800" b="1" dirty="0">
+            <a:endParaRPr lang="zh-TW" altLang="en-US" sz="8000" b="1" dirty="0">
+              <a:solidFill>
+                <a:srgbClr val="000066"/>
+              </a:solidFill>
+              <a:effectLst>
+                <a:outerShdw blurRad="38100" dist="38100" dir="2700000" algn="tl">
+                  <a:srgbClr val="000000">
+                    <a:alpha val="43137"/>
+                  </a:srgbClr>
+                </a:outerShdw>
+              </a:effectLst>
+              <a:latin typeface="微軟正黑體" pitchFamily="34" charset="-120"/>
+              <a:ea typeface="微軟正黑體" pitchFamily="34" charset="-120"/>
+            </a:endParaRPr>
+          </a:p>
+        </p:txBody>
+      </p:sp>
+    </p:spTree>
+    <p:extLst>
+      <p:ext uri="{BB962C8B-B14F-4D97-AF65-F5344CB8AC3E}">
+        <p14:creationId xmlns:p14="http://schemas.microsoft.com/office/powerpoint/2010/main" val="662622217"/>
+      </p:ext>
+    </p:extLst>
+  </p:cSld>
+  <p:clrMapOvr>
+    <a:masterClrMapping/>
+  </p:clrMapOvr>
+</p:sld>
+</file>
+
+<file path=ppt/slides/slide10.xml><?xml version="1.0" encoding="utf-8"?>
+<p:sld xmlns:a="http://schemas.openxmlformats.org/drawingml/2006/main" xmlns:r="http://schemas.openxmlformats.org/officeDocument/2006/relationships" xmlns:p="http://schemas.openxmlformats.org/presentationml/2006/main">
+  <p:cSld>
+    <p:spTree>
+      <p:nvGrpSpPr>
+        <p:cNvPr id="1" name=""/>
+        <p:cNvGrpSpPr/>
+        <p:nvPr/>
+      </p:nvGrpSpPr>
+      <p:grpSpPr>
+        <a:xfrm>
+          <a:off x="0" y="0"/>
+          <a:ext cx="0" cy="0"/>
+          <a:chOff x="0" y="0"/>
+          <a:chExt cx="0" cy="0"/>
+        </a:xfrm>
+      </p:grpSpPr>
+      <p:sp>
+        <p:nvSpPr>
+          <p:cNvPr id="5" name="內容版面配置區 4"/>
+          <p:cNvSpPr>
+            <a:spLocks noGrp="1"/>
+          </p:cNvSpPr>
+          <p:nvPr>
+            <p:ph idx="1"/>
+          </p:nvPr>
+        </p:nvSpPr>
+        <p:spPr>
+          <a:xfrm>
+            <a:off x="0" y="2084851"/>
+            <a:ext cx="12192000" cy="2404863"/>
+          </a:xfrm>
+        </p:spPr>
+        <p:txBody>
+          <a:bodyPr anchor="ctr">
+            <a:normAutofit/>
+          </a:bodyPr>
+          <a:lstStyle/>
+          <a:p>
+            <a:pPr algn="ctr">
+              <a:buNone/>
+            </a:pPr>
+            <a:r>
+              <a:rPr lang="zh-CN" altLang="en-US" sz="6400" b="1" dirty="0">
+                <a:solidFill>
+                  <a:srgbClr val="000066"/>
+                </a:solidFill>
+                <a:latin typeface="微軟正黑體" pitchFamily="34" charset="-120"/>
+                <a:ea typeface="微軟正黑體" pitchFamily="34" charset="-120"/>
+              </a:rPr>
+              <a:t>主應許是我所靠</a:t>
+            </a:r>
+            <a:endParaRPr lang="en-US" altLang="zh-CN" sz="6400" b="1" dirty="0">
               <a:solidFill>
                 <a:srgbClr val="000066"/>
               </a:solidFill>
@@ -3102,39 +3233,21 @@
               <a:ea typeface="微軟正黑體" pitchFamily="34" charset="-120"/>
             </a:endParaRPr>
           </a:p>
-        </p:txBody>
-      </p:sp>
-      <p:sp>
-        <p:nvSpPr>
-          <p:cNvPr id="5" name="內容版面配置區 4"/>
-          <p:cNvSpPr>
-            <a:spLocks noGrp="1"/>
-          </p:cNvSpPr>
-          <p:nvPr>
-            <p:ph idx="1"/>
-          </p:nvPr>
-        </p:nvSpPr>
-        <p:spPr/>
-        <p:txBody>
-          <a:bodyPr>
-            <a:normAutofit/>
-          </a:bodyPr>
-          <a:lstStyle/>
           <a:p>
             <a:pPr algn="ctr">
               <a:buNone/>
             </a:pPr>
             <a:r>
-              <a:rPr lang="zh-CN" altLang="en-US" sz="5400" b="1" dirty="0">
+              <a:rPr lang="zh-CN" altLang="en-US" sz="6400" b="1" dirty="0">
                 <a:solidFill>
                   <a:srgbClr val="000066"/>
                 </a:solidFill>
                 <a:latin typeface="微軟正黑體" pitchFamily="34" charset="-120"/>
                 <a:ea typeface="微軟正黑體" pitchFamily="34" charset="-120"/>
               </a:rPr>
-              <a:t>我今來就十字架</a:t>
-            </a:r>
-            <a:endParaRPr lang="en-US" altLang="zh-CN" sz="5400" b="1" dirty="0">
+              <a:t>主寶血將心洗清</a:t>
+            </a:r>
+            <a:endParaRPr lang="en-US" altLang="zh-CN" sz="6400" b="1" dirty="0">
               <a:solidFill>
                 <a:srgbClr val="000066"/>
               </a:solidFill>
@@ -3142,21 +3255,113 @@
               <a:ea typeface="微軟正黑體" pitchFamily="34" charset="-120"/>
             </a:endParaRPr>
           </a:p>
+        </p:txBody>
+      </p:sp>
+      <p:sp>
+        <p:nvSpPr>
+          <p:cNvPr id="3" name="TextBox 2"/>
+          <p:cNvSpPr txBox="1"/>
+          <p:nvPr/>
+        </p:nvSpPr>
+        <p:spPr>
+          <a:xfrm>
+            <a:off x="0" y="5061181"/>
+            <a:ext cx="12192000" cy="666786"/>
+          </a:xfrm>
+          <a:prstGeom prst="rect">
+            <a:avLst/>
+          </a:prstGeom>
+          <a:noFill/>
+        </p:spPr>
+        <p:txBody>
+          <a:bodyPr wrap="square" rtlCol="0">
+            <a:spAutoFit/>
+          </a:bodyPr>
+          <a:lstStyle/>
+          <a:p>
+            <a:pPr algn="ctr"/>
+            <a:r>
+              <a:rPr lang="en-US" sz="3733" b="1" dirty="0">
+                <a:solidFill>
+                  <a:srgbClr val="000066"/>
+                </a:solidFill>
+              </a:rPr>
+              <a:t>( 3 / 4 )</a:t>
+            </a:r>
+            <a:endParaRPr lang="vi-VN" sz="3733" b="1" dirty="0">
+              <a:solidFill>
+                <a:srgbClr val="000066"/>
+              </a:solidFill>
+            </a:endParaRPr>
+          </a:p>
+        </p:txBody>
+      </p:sp>
+    </p:spTree>
+    <p:extLst>
+      <p:ext uri="{BB962C8B-B14F-4D97-AF65-F5344CB8AC3E}">
+        <p14:creationId xmlns:p14="http://schemas.microsoft.com/office/powerpoint/2010/main" val="640212817"/>
+      </p:ext>
+    </p:extLst>
+  </p:cSld>
+  <p:clrMapOvr>
+    <a:masterClrMapping/>
+  </p:clrMapOvr>
+</p:sld>
+</file>
+
+<file path=ppt/slides/slide11.xml><?xml version="1.0" encoding="utf-8"?>
+<p:sld xmlns:a="http://schemas.openxmlformats.org/drawingml/2006/main" xmlns:r="http://schemas.openxmlformats.org/officeDocument/2006/relationships" xmlns:p="http://schemas.openxmlformats.org/presentationml/2006/main">
+  <p:cSld>
+    <p:spTree>
+      <p:nvGrpSpPr>
+        <p:cNvPr id="1" name=""/>
+        <p:cNvGrpSpPr/>
+        <p:nvPr/>
+      </p:nvGrpSpPr>
+      <p:grpSpPr>
+        <a:xfrm>
+          <a:off x="0" y="0"/>
+          <a:ext cx="0" cy="0"/>
+          <a:chOff x="0" y="0"/>
+          <a:chExt cx="0" cy="0"/>
+        </a:xfrm>
+      </p:grpSpPr>
+      <p:sp>
+        <p:nvSpPr>
+          <p:cNvPr id="5" name="內容版面配置區 4"/>
+          <p:cNvSpPr>
+            <a:spLocks noGrp="1"/>
+          </p:cNvSpPr>
+          <p:nvPr>
+            <p:ph idx="1"/>
+          </p:nvPr>
+        </p:nvSpPr>
+        <p:spPr>
+          <a:xfrm>
+            <a:off x="0" y="2084851"/>
+            <a:ext cx="12192000" cy="2404863"/>
+          </a:xfrm>
+        </p:spPr>
+        <p:txBody>
+          <a:bodyPr anchor="ctr">
+            <a:normAutofit/>
+          </a:bodyPr>
+          <a:lstStyle/>
           <a:p>
             <a:pPr algn="ctr">
               <a:buNone/>
             </a:pPr>
             <a:r>
-              <a:rPr lang="zh-CN" altLang="en-US" sz="5400" b="1" dirty="0">
+              <a:rPr lang="zh-CN" altLang="en-US" sz="6400" b="1" dirty="0">
                 <a:solidFill>
                   <a:srgbClr val="000066"/>
                 </a:solidFill>
                 <a:latin typeface="微軟正黑體" pitchFamily="34" charset="-120"/>
                 <a:ea typeface="微軟正黑體" pitchFamily="34" charset="-120"/>
               </a:rPr>
-              <a:t>貧窮軟弱瞎心眼</a:t>
-            </a:r>
-            <a:endParaRPr lang="en-US" altLang="zh-CN" sz="5400" b="1" dirty="0">
+              <a:t>主足前我虔心禱</a:t>
+            </a:r>
+            <a:endParaRPr lang="en-US" altLang="zh-CN" sz="6400" b="1" dirty="0">
               <a:solidFill>
                 <a:srgbClr val="000066"/>
               </a:solidFill>
@@ -3169,16 +3374,16 @@
               <a:buNone/>
             </a:pPr>
             <a:r>
-              <a:rPr lang="zh-CN" altLang="en-US" sz="5400" b="1" dirty="0">
+              <a:rPr lang="zh-CN" altLang="en-US" sz="6400" b="1" dirty="0">
                 <a:solidFill>
                   <a:srgbClr val="000066"/>
                 </a:solidFill>
                 <a:latin typeface="微軟正黑體" pitchFamily="34" charset="-120"/>
                 <a:ea typeface="微軟正黑體" pitchFamily="34" charset="-120"/>
               </a:rPr>
-              <a:t>看破萬物像土渣</a:t>
-            </a:r>
-            <a:endParaRPr lang="en-US" altLang="zh-CN" sz="5400" b="1" dirty="0">
+              <a:t>與基督十架同釘</a:t>
+            </a:r>
+            <a:endParaRPr lang="zh-TW" altLang="en-US" sz="6400" b="1" dirty="0">
               <a:solidFill>
                 <a:srgbClr val="000066"/>
               </a:solidFill>
@@ -3186,21 +3391,113 @@
               <a:ea typeface="微軟正黑體" pitchFamily="34" charset="-120"/>
             </a:endParaRPr>
           </a:p>
+        </p:txBody>
+      </p:sp>
+      <p:sp>
+        <p:nvSpPr>
+          <p:cNvPr id="3" name="TextBox 2"/>
+          <p:cNvSpPr txBox="1"/>
+          <p:nvPr/>
+        </p:nvSpPr>
+        <p:spPr>
+          <a:xfrm>
+            <a:off x="0" y="5061181"/>
+            <a:ext cx="12192000" cy="666786"/>
+          </a:xfrm>
+          <a:prstGeom prst="rect">
+            <a:avLst/>
+          </a:prstGeom>
+          <a:noFill/>
+        </p:spPr>
+        <p:txBody>
+          <a:bodyPr wrap="square" rtlCol="0">
+            <a:spAutoFit/>
+          </a:bodyPr>
+          <a:lstStyle/>
+          <a:p>
+            <a:pPr algn="ctr"/>
+            <a:r>
+              <a:rPr lang="en-US" sz="3733" b="1" dirty="0">
+                <a:solidFill>
+                  <a:srgbClr val="000066"/>
+                </a:solidFill>
+              </a:rPr>
+              <a:t>( 3 / 4 )</a:t>
+            </a:r>
+            <a:endParaRPr lang="vi-VN" sz="3733" b="1" dirty="0">
+              <a:solidFill>
+                <a:srgbClr val="000066"/>
+              </a:solidFill>
+            </a:endParaRPr>
+          </a:p>
+        </p:txBody>
+      </p:sp>
+    </p:spTree>
+    <p:extLst>
+      <p:ext uri="{BB962C8B-B14F-4D97-AF65-F5344CB8AC3E}">
+        <p14:creationId xmlns:p14="http://schemas.microsoft.com/office/powerpoint/2010/main" val="3345460634"/>
+      </p:ext>
+    </p:extLst>
+  </p:cSld>
+  <p:clrMapOvr>
+    <a:masterClrMapping/>
+  </p:clrMapOvr>
+</p:sld>
+</file>
+
+<file path=ppt/slides/slide12.xml><?xml version="1.0" encoding="utf-8"?>
+<p:sld xmlns:a="http://schemas.openxmlformats.org/drawingml/2006/main" xmlns:r="http://schemas.openxmlformats.org/officeDocument/2006/relationships" xmlns:p="http://schemas.openxmlformats.org/presentationml/2006/main">
+  <p:cSld>
+    <p:spTree>
+      <p:nvGrpSpPr>
+        <p:cNvPr id="1" name=""/>
+        <p:cNvGrpSpPr/>
+        <p:nvPr/>
+      </p:nvGrpSpPr>
+      <p:grpSpPr>
+        <a:xfrm>
+          <a:off x="0" y="0"/>
+          <a:ext cx="0" cy="0"/>
+          <a:chOff x="0" y="0"/>
+          <a:chExt cx="0" cy="0"/>
+        </a:xfrm>
+      </p:grpSpPr>
+      <p:sp>
+        <p:nvSpPr>
+          <p:cNvPr id="5" name="內容版面配置區 4"/>
+          <p:cNvSpPr>
+            <a:spLocks noGrp="1"/>
+          </p:cNvSpPr>
+          <p:nvPr>
+            <p:ph idx="1"/>
+          </p:nvPr>
+        </p:nvSpPr>
+        <p:spPr>
+          <a:xfrm>
+            <a:off x="0" y="2084851"/>
+            <a:ext cx="12192000" cy="2404863"/>
+          </a:xfrm>
+        </p:spPr>
+        <p:txBody>
+          <a:bodyPr anchor="ctr">
+            <a:normAutofit/>
+          </a:bodyPr>
+          <a:lstStyle/>
           <a:p>
             <a:pPr algn="ctr">
               <a:buNone/>
             </a:pPr>
             <a:r>
-              <a:rPr lang="zh-CN" altLang="en-US" sz="5400" b="1" dirty="0">
+              <a:rPr lang="zh-CN" altLang="en-US" sz="6400" b="1" dirty="0">
                 <a:solidFill>
                   <a:srgbClr val="000066"/>
                 </a:solidFill>
                 <a:latin typeface="微軟正黑體" pitchFamily="34" charset="-120"/>
                 <a:ea typeface="微軟正黑體" pitchFamily="34" charset="-120"/>
               </a:rPr>
-              <a:t>蒙救恩盡脫諸患</a:t>
-            </a:r>
-            <a:endParaRPr lang="zh-TW" altLang="en-US" sz="5400" b="1" dirty="0">
+              <a:t>我今靠救主鴻恩</a:t>
+            </a:r>
+            <a:endParaRPr lang="en-US" altLang="zh-CN" sz="6400" b="1" dirty="0">
               <a:solidFill>
                 <a:srgbClr val="000066"/>
               </a:solidFill>
@@ -3208,18 +3505,234 @@
               <a:ea typeface="微軟正黑體" pitchFamily="34" charset="-120"/>
             </a:endParaRPr>
           </a:p>
-        </p:txBody>
-      </p:sp>
-      <p:sp>
-        <p:nvSpPr>
-          <p:cNvPr id="2" name="TextBox 1"/>
+          <a:p>
+            <a:pPr algn="ctr">
+              <a:buNone/>
+            </a:pPr>
+            <a:r>
+              <a:rPr lang="zh-CN" altLang="en-US" sz="6400" b="1" dirty="0">
+                <a:solidFill>
+                  <a:srgbClr val="000066"/>
+                </a:solidFill>
+                <a:latin typeface="微軟正黑體" pitchFamily="34" charset="-120"/>
+                <a:ea typeface="微軟正黑體" pitchFamily="34" charset="-120"/>
+              </a:rPr>
+              <a:t>因爲主可憐罪人</a:t>
+            </a:r>
+            <a:endParaRPr lang="en-US" altLang="zh-CN" sz="6400" b="1" dirty="0">
+              <a:solidFill>
+                <a:srgbClr val="000066"/>
+              </a:solidFill>
+              <a:latin typeface="微軟正黑體" pitchFamily="34" charset="-120"/>
+              <a:ea typeface="微軟正黑體" pitchFamily="34" charset="-120"/>
+            </a:endParaRPr>
+          </a:p>
+        </p:txBody>
+      </p:sp>
+    </p:spTree>
+    <p:extLst>
+      <p:ext uri="{BB962C8B-B14F-4D97-AF65-F5344CB8AC3E}">
+        <p14:creationId xmlns:p14="http://schemas.microsoft.com/office/powerpoint/2010/main" val="2815817562"/>
+      </p:ext>
+    </p:extLst>
+  </p:cSld>
+  <p:clrMapOvr>
+    <a:masterClrMapping/>
+  </p:clrMapOvr>
+</p:sld>
+</file>
+
+<file path=ppt/slides/slide13.xml><?xml version="1.0" encoding="utf-8"?>
+<p:sld xmlns:a="http://schemas.openxmlformats.org/drawingml/2006/main" xmlns:r="http://schemas.openxmlformats.org/officeDocument/2006/relationships" xmlns:p="http://schemas.openxmlformats.org/presentationml/2006/main">
+  <p:cSld>
+    <p:spTree>
+      <p:nvGrpSpPr>
+        <p:cNvPr id="1" name=""/>
+        <p:cNvGrpSpPr/>
+        <p:nvPr/>
+      </p:nvGrpSpPr>
+      <p:grpSpPr>
+        <a:xfrm>
+          <a:off x="0" y="0"/>
+          <a:ext cx="0" cy="0"/>
+          <a:chOff x="0" y="0"/>
+          <a:chExt cx="0" cy="0"/>
+        </a:xfrm>
+      </p:grpSpPr>
+      <p:sp>
+        <p:nvSpPr>
+          <p:cNvPr id="5" name="內容版面配置區 4"/>
+          <p:cNvSpPr>
+            <a:spLocks noGrp="1"/>
+          </p:cNvSpPr>
+          <p:nvPr>
+            <p:ph idx="1"/>
+          </p:nvPr>
+        </p:nvSpPr>
+        <p:spPr>
+          <a:xfrm>
+            <a:off x="0" y="2084851"/>
+            <a:ext cx="12192000" cy="2404863"/>
+          </a:xfrm>
+        </p:spPr>
+        <p:txBody>
+          <a:bodyPr anchor="ctr">
+            <a:normAutofit/>
+          </a:bodyPr>
+          <a:lstStyle/>
+          <a:p>
+            <a:pPr algn="ctr">
+              <a:buNone/>
+            </a:pPr>
+            <a:r>
+              <a:rPr lang="zh-CN" altLang="en-US" sz="6400" b="1" dirty="0">
+                <a:solidFill>
+                  <a:srgbClr val="000066"/>
+                </a:solidFill>
+                <a:latin typeface="微軟正黑體" pitchFamily="34" charset="-120"/>
+                <a:ea typeface="微軟正黑體" pitchFamily="34" charset="-120"/>
+              </a:rPr>
+              <a:t>今向主俯首敬拜</a:t>
+            </a:r>
+            <a:endParaRPr lang="en-US" altLang="zh-CN" sz="6400" b="1" dirty="0">
+              <a:solidFill>
+                <a:srgbClr val="000066"/>
+              </a:solidFill>
+              <a:latin typeface="微軟正黑體" pitchFamily="34" charset="-120"/>
+              <a:ea typeface="微軟正黑體" pitchFamily="34" charset="-120"/>
+            </a:endParaRPr>
+          </a:p>
+          <a:p>
+            <a:pPr algn="ctr">
+              <a:buNone/>
+            </a:pPr>
+            <a:r>
+              <a:rPr lang="zh-CN" altLang="en-US" sz="6400" b="1" dirty="0">
+                <a:solidFill>
+                  <a:srgbClr val="000066"/>
+                </a:solidFill>
+                <a:latin typeface="微軟正黑體" pitchFamily="34" charset="-120"/>
+                <a:ea typeface="微軟正黑體" pitchFamily="34" charset="-120"/>
+              </a:rPr>
+              <a:t>懇求主免我罪債</a:t>
+            </a:r>
+            <a:endParaRPr lang="zh-TW" altLang="en-US" sz="6400" b="1" dirty="0">
+              <a:solidFill>
+                <a:srgbClr val="000066"/>
+              </a:solidFill>
+              <a:latin typeface="微軟正黑體" pitchFamily="34" charset="-120"/>
+              <a:ea typeface="微軟正黑體" pitchFamily="34" charset="-120"/>
+            </a:endParaRPr>
+          </a:p>
+        </p:txBody>
+      </p:sp>
+    </p:spTree>
+    <p:extLst>
+      <p:ext uri="{BB962C8B-B14F-4D97-AF65-F5344CB8AC3E}">
+        <p14:creationId xmlns:p14="http://schemas.microsoft.com/office/powerpoint/2010/main" val="1045137538"/>
+      </p:ext>
+    </p:extLst>
+  </p:cSld>
+  <p:clrMapOvr>
+    <a:masterClrMapping/>
+  </p:clrMapOvr>
+</p:sld>
+</file>
+
+<file path=ppt/slides/slide14.xml><?xml version="1.0" encoding="utf-8"?>
+<p:sld xmlns:a="http://schemas.openxmlformats.org/drawingml/2006/main" xmlns:r="http://schemas.openxmlformats.org/officeDocument/2006/relationships" xmlns:p="http://schemas.openxmlformats.org/presentationml/2006/main">
+  <p:cSld>
+    <p:spTree>
+      <p:nvGrpSpPr>
+        <p:cNvPr id="1" name=""/>
+        <p:cNvGrpSpPr/>
+        <p:nvPr/>
+      </p:nvGrpSpPr>
+      <p:grpSpPr>
+        <a:xfrm>
+          <a:off x="0" y="0"/>
+          <a:ext cx="0" cy="0"/>
+          <a:chOff x="0" y="0"/>
+          <a:chExt cx="0" cy="0"/>
+        </a:xfrm>
+      </p:grpSpPr>
+      <p:sp>
+        <p:nvSpPr>
+          <p:cNvPr id="5" name="內容版面配置區 4"/>
+          <p:cNvSpPr>
+            <a:spLocks noGrp="1"/>
+          </p:cNvSpPr>
+          <p:nvPr>
+            <p:ph idx="1"/>
+          </p:nvPr>
+        </p:nvSpPr>
+        <p:spPr>
+          <a:xfrm>
+            <a:off x="0" y="2084851"/>
+            <a:ext cx="12192000" cy="2404863"/>
+          </a:xfrm>
+        </p:spPr>
+        <p:txBody>
+          <a:bodyPr anchor="ctr">
+            <a:normAutofit/>
+          </a:bodyPr>
+          <a:lstStyle/>
+          <a:p>
+            <a:pPr algn="ctr">
+              <a:buNone/>
+            </a:pPr>
+            <a:r>
+              <a:rPr lang="zh-CN" altLang="en-US" sz="6400" b="1" dirty="0">
+                <a:solidFill>
+                  <a:srgbClr val="000066"/>
+                </a:solidFill>
+                <a:latin typeface="微軟正黑體" pitchFamily="34" charset="-120"/>
+                <a:ea typeface="微軟正黑體" pitchFamily="34" charset="-120"/>
+              </a:rPr>
+              <a:t>求主靈充滿我心</a:t>
+            </a:r>
+            <a:endParaRPr lang="en-US" altLang="zh-CN" sz="6400" b="1" dirty="0">
+              <a:solidFill>
+                <a:srgbClr val="000066"/>
+              </a:solidFill>
+              <a:latin typeface="微軟正黑體" pitchFamily="34" charset="-120"/>
+              <a:ea typeface="微軟正黑體" pitchFamily="34" charset="-120"/>
+            </a:endParaRPr>
+          </a:p>
+          <a:p>
+            <a:pPr algn="ctr">
+              <a:buNone/>
+            </a:pPr>
+            <a:r>
+              <a:rPr lang="zh-CN" altLang="en-US" sz="6400" b="1" dirty="0">
+                <a:solidFill>
+                  <a:srgbClr val="000066"/>
+                </a:solidFill>
+                <a:latin typeface="微軟正黑體" pitchFamily="34" charset="-120"/>
+                <a:ea typeface="微軟正黑體" pitchFamily="34" charset="-120"/>
+              </a:rPr>
+              <a:t>使生活快樂歡暢</a:t>
+            </a:r>
+            <a:endParaRPr lang="en-US" altLang="zh-CN" sz="6400" b="1" dirty="0">
+              <a:solidFill>
+                <a:srgbClr val="000066"/>
+              </a:solidFill>
+              <a:latin typeface="微軟正黑體" pitchFamily="34" charset="-120"/>
+              <a:ea typeface="微軟正黑體" pitchFamily="34" charset="-120"/>
+            </a:endParaRPr>
+          </a:p>
+        </p:txBody>
+      </p:sp>
+      <p:sp>
+        <p:nvSpPr>
+          <p:cNvPr id="3" name="TextBox 2"/>
           <p:cNvSpPr txBox="1"/>
           <p:nvPr/>
         </p:nvSpPr>
         <p:spPr>
           <a:xfrm>
-            <a:off x="1703512" y="1700808"/>
-            <a:ext cx="792088" cy="923330"/>
+            <a:off x="0" y="5061181"/>
+            <a:ext cx="12192000" cy="666786"/>
           </a:xfrm>
           <a:prstGeom prst="rect">
             <a:avLst/>
@@ -3232,15 +3745,16 @@
           </a:bodyPr>
           <a:lstStyle/>
           <a:p>
-            <a:r>
-              <a:rPr lang="en-US" sz="5400" b="1" dirty="0" smtClean="0">
+            <a:pPr algn="ctr"/>
+            <a:r>
+              <a:rPr lang="en-US" sz="3733" b="1" dirty="0">
                 <a:solidFill>
                   <a:srgbClr val="000066"/>
                 </a:solidFill>
               </a:rPr>
-              <a:t>1.</a:t>
-            </a:r>
-            <a:endParaRPr lang="vi-VN" sz="5400" b="1" dirty="0">
+              <a:t>( 4 / 4 )</a:t>
+            </a:r>
+            <a:endParaRPr lang="vi-VN" sz="3733" b="1" dirty="0">
               <a:solidFill>
                 <a:srgbClr val="000066"/>
               </a:solidFill>
@@ -3249,6 +3763,341 @@
         </p:txBody>
       </p:sp>
     </p:spTree>
+    <p:extLst>
+      <p:ext uri="{BB962C8B-B14F-4D97-AF65-F5344CB8AC3E}">
+        <p14:creationId xmlns:p14="http://schemas.microsoft.com/office/powerpoint/2010/main" val="1426923940"/>
+      </p:ext>
+    </p:extLst>
+  </p:cSld>
+  <p:clrMapOvr>
+    <a:masterClrMapping/>
+  </p:clrMapOvr>
+</p:sld>
+</file>
+
+<file path=ppt/slides/slide15.xml><?xml version="1.0" encoding="utf-8"?>
+<p:sld xmlns:a="http://schemas.openxmlformats.org/drawingml/2006/main" xmlns:r="http://schemas.openxmlformats.org/officeDocument/2006/relationships" xmlns:p="http://schemas.openxmlformats.org/presentationml/2006/main">
+  <p:cSld>
+    <p:spTree>
+      <p:nvGrpSpPr>
+        <p:cNvPr id="1" name=""/>
+        <p:cNvGrpSpPr/>
+        <p:nvPr/>
+      </p:nvGrpSpPr>
+      <p:grpSpPr>
+        <a:xfrm>
+          <a:off x="0" y="0"/>
+          <a:ext cx="0" cy="0"/>
+          <a:chOff x="0" y="0"/>
+          <a:chExt cx="0" cy="0"/>
+        </a:xfrm>
+      </p:grpSpPr>
+      <p:sp>
+        <p:nvSpPr>
+          <p:cNvPr id="5" name="內容版面配置區 4"/>
+          <p:cNvSpPr>
+            <a:spLocks noGrp="1"/>
+          </p:cNvSpPr>
+          <p:nvPr>
+            <p:ph idx="1"/>
+          </p:nvPr>
+        </p:nvSpPr>
+        <p:spPr>
+          <a:xfrm>
+            <a:off x="0" y="2084851"/>
+            <a:ext cx="12192000" cy="2404863"/>
+          </a:xfrm>
+        </p:spPr>
+        <p:txBody>
+          <a:bodyPr anchor="ctr">
+            <a:normAutofit/>
+          </a:bodyPr>
+          <a:lstStyle/>
+          <a:p>
+            <a:pPr algn="ctr">
+              <a:buNone/>
+            </a:pPr>
+            <a:r>
+              <a:rPr lang="zh-CN" altLang="en-US" sz="6400" b="1" dirty="0">
+                <a:solidFill>
+                  <a:srgbClr val="000066"/>
+                </a:solidFill>
+                <a:latin typeface="微軟正黑體" pitchFamily="34" charset="-120"/>
+                <a:ea typeface="微軟正黑體" pitchFamily="34" charset="-120"/>
+              </a:rPr>
+              <a:t>諸罪債主已還清</a:t>
+            </a:r>
+            <a:endParaRPr lang="en-US" altLang="zh-CN" sz="6400" b="1" dirty="0">
+              <a:solidFill>
+                <a:srgbClr val="000066"/>
+              </a:solidFill>
+              <a:latin typeface="微軟正黑體" pitchFamily="34" charset="-120"/>
+              <a:ea typeface="微軟正黑體" pitchFamily="34" charset="-120"/>
+            </a:endParaRPr>
+          </a:p>
+          <a:p>
+            <a:pPr algn="ctr">
+              <a:buNone/>
+            </a:pPr>
+            <a:r>
+              <a:rPr lang="zh-CN" altLang="en-US" sz="6400" b="1" dirty="0">
+                <a:solidFill>
+                  <a:srgbClr val="000066"/>
+                </a:solidFill>
+                <a:latin typeface="微軟正黑體" pitchFamily="34" charset="-120"/>
+                <a:ea typeface="微軟正黑體" pitchFamily="34" charset="-120"/>
+              </a:rPr>
+              <a:t>大榮耀歸與羔羊</a:t>
+            </a:r>
+            <a:endParaRPr lang="zh-TW" altLang="en-US" sz="6400" b="1" dirty="0">
+              <a:solidFill>
+                <a:srgbClr val="000066"/>
+              </a:solidFill>
+              <a:latin typeface="微軟正黑體" pitchFamily="34" charset="-120"/>
+              <a:ea typeface="微軟正黑體" pitchFamily="34" charset="-120"/>
+            </a:endParaRPr>
+          </a:p>
+        </p:txBody>
+      </p:sp>
+      <p:sp>
+        <p:nvSpPr>
+          <p:cNvPr id="3" name="TextBox 2"/>
+          <p:cNvSpPr txBox="1"/>
+          <p:nvPr/>
+        </p:nvSpPr>
+        <p:spPr>
+          <a:xfrm>
+            <a:off x="0" y="5061181"/>
+            <a:ext cx="12192000" cy="666786"/>
+          </a:xfrm>
+          <a:prstGeom prst="rect">
+            <a:avLst/>
+          </a:prstGeom>
+          <a:noFill/>
+        </p:spPr>
+        <p:txBody>
+          <a:bodyPr wrap="square" rtlCol="0">
+            <a:spAutoFit/>
+          </a:bodyPr>
+          <a:lstStyle/>
+          <a:p>
+            <a:pPr algn="ctr"/>
+            <a:r>
+              <a:rPr lang="en-US" sz="3733" b="1" dirty="0">
+                <a:solidFill>
+                  <a:srgbClr val="000066"/>
+                </a:solidFill>
+              </a:rPr>
+              <a:t>( 4 / 4 )</a:t>
+            </a:r>
+            <a:endParaRPr lang="vi-VN" sz="3733" b="1" dirty="0">
+              <a:solidFill>
+                <a:srgbClr val="000066"/>
+              </a:solidFill>
+            </a:endParaRPr>
+          </a:p>
+        </p:txBody>
+      </p:sp>
+    </p:spTree>
+    <p:extLst>
+      <p:ext uri="{BB962C8B-B14F-4D97-AF65-F5344CB8AC3E}">
+        <p14:creationId xmlns:p14="http://schemas.microsoft.com/office/powerpoint/2010/main" val="3055720400"/>
+      </p:ext>
+    </p:extLst>
+  </p:cSld>
+  <p:clrMapOvr>
+    <a:masterClrMapping/>
+  </p:clrMapOvr>
+</p:sld>
+</file>
+
+<file path=ppt/slides/slide16.xml><?xml version="1.0" encoding="utf-8"?>
+<p:sld xmlns:a="http://schemas.openxmlformats.org/drawingml/2006/main" xmlns:r="http://schemas.openxmlformats.org/officeDocument/2006/relationships" xmlns:p="http://schemas.openxmlformats.org/presentationml/2006/main">
+  <p:cSld>
+    <p:spTree>
+      <p:nvGrpSpPr>
+        <p:cNvPr id="1" name=""/>
+        <p:cNvGrpSpPr/>
+        <p:nvPr/>
+      </p:nvGrpSpPr>
+      <p:grpSpPr>
+        <a:xfrm>
+          <a:off x="0" y="0"/>
+          <a:ext cx="0" cy="0"/>
+          <a:chOff x="0" y="0"/>
+          <a:chExt cx="0" cy="0"/>
+        </a:xfrm>
+      </p:grpSpPr>
+      <p:sp>
+        <p:nvSpPr>
+          <p:cNvPr id="5" name="內容版面配置區 4"/>
+          <p:cNvSpPr>
+            <a:spLocks noGrp="1"/>
+          </p:cNvSpPr>
+          <p:nvPr>
+            <p:ph idx="1"/>
+          </p:nvPr>
+        </p:nvSpPr>
+        <p:spPr>
+          <a:xfrm>
+            <a:off x="0" y="2084851"/>
+            <a:ext cx="12192000" cy="2404863"/>
+          </a:xfrm>
+        </p:spPr>
+        <p:txBody>
+          <a:bodyPr anchor="ctr">
+            <a:normAutofit/>
+          </a:bodyPr>
+          <a:lstStyle/>
+          <a:p>
+            <a:pPr algn="ctr">
+              <a:buNone/>
+            </a:pPr>
+            <a:r>
+              <a:rPr lang="zh-CN" altLang="en-US" sz="6400" b="1" dirty="0">
+                <a:solidFill>
+                  <a:srgbClr val="000066"/>
+                </a:solidFill>
+                <a:latin typeface="微軟正黑體" pitchFamily="34" charset="-120"/>
+                <a:ea typeface="微軟正黑體" pitchFamily="34" charset="-120"/>
+              </a:rPr>
+              <a:t>我今靠救主鴻恩</a:t>
+            </a:r>
+            <a:endParaRPr lang="en-US" altLang="zh-CN" sz="6400" b="1" dirty="0">
+              <a:solidFill>
+                <a:srgbClr val="000066"/>
+              </a:solidFill>
+              <a:latin typeface="微軟正黑體" pitchFamily="34" charset="-120"/>
+              <a:ea typeface="微軟正黑體" pitchFamily="34" charset="-120"/>
+            </a:endParaRPr>
+          </a:p>
+          <a:p>
+            <a:pPr algn="ctr">
+              <a:buNone/>
+            </a:pPr>
+            <a:r>
+              <a:rPr lang="zh-CN" altLang="en-US" sz="6400" b="1" dirty="0">
+                <a:solidFill>
+                  <a:srgbClr val="000066"/>
+                </a:solidFill>
+                <a:latin typeface="微軟正黑體" pitchFamily="34" charset="-120"/>
+                <a:ea typeface="微軟正黑體" pitchFamily="34" charset="-120"/>
+              </a:rPr>
+              <a:t>因爲主可憐罪人</a:t>
+            </a:r>
+            <a:endParaRPr lang="en-US" altLang="zh-CN" sz="6400" b="1" dirty="0">
+              <a:solidFill>
+                <a:srgbClr val="000066"/>
+              </a:solidFill>
+              <a:latin typeface="微軟正黑體" pitchFamily="34" charset="-120"/>
+              <a:ea typeface="微軟正黑體" pitchFamily="34" charset="-120"/>
+            </a:endParaRPr>
+          </a:p>
+        </p:txBody>
+      </p:sp>
+    </p:spTree>
+    <p:extLst>
+      <p:ext uri="{BB962C8B-B14F-4D97-AF65-F5344CB8AC3E}">
+        <p14:creationId xmlns:p14="http://schemas.microsoft.com/office/powerpoint/2010/main" val="1456885392"/>
+      </p:ext>
+    </p:extLst>
+  </p:cSld>
+  <p:clrMapOvr>
+    <a:masterClrMapping/>
+  </p:clrMapOvr>
+</p:sld>
+</file>
+
+<file path=ppt/slides/slide17.xml><?xml version="1.0" encoding="utf-8"?>
+<p:sld xmlns:a="http://schemas.openxmlformats.org/drawingml/2006/main" xmlns:r="http://schemas.openxmlformats.org/officeDocument/2006/relationships" xmlns:p="http://schemas.openxmlformats.org/presentationml/2006/main">
+  <p:cSld>
+    <p:spTree>
+      <p:nvGrpSpPr>
+        <p:cNvPr id="1" name=""/>
+        <p:cNvGrpSpPr/>
+        <p:nvPr/>
+      </p:nvGrpSpPr>
+      <p:grpSpPr>
+        <a:xfrm>
+          <a:off x="0" y="0"/>
+          <a:ext cx="0" cy="0"/>
+          <a:chOff x="0" y="0"/>
+          <a:chExt cx="0" cy="0"/>
+        </a:xfrm>
+      </p:grpSpPr>
+      <p:sp>
+        <p:nvSpPr>
+          <p:cNvPr id="5" name="內容版面配置區 4"/>
+          <p:cNvSpPr>
+            <a:spLocks noGrp="1"/>
+          </p:cNvSpPr>
+          <p:nvPr>
+            <p:ph idx="1"/>
+          </p:nvPr>
+        </p:nvSpPr>
+        <p:spPr>
+          <a:xfrm>
+            <a:off x="0" y="2084851"/>
+            <a:ext cx="12192000" cy="2404863"/>
+          </a:xfrm>
+        </p:spPr>
+        <p:txBody>
+          <a:bodyPr anchor="ctr">
+            <a:normAutofit/>
+          </a:bodyPr>
+          <a:lstStyle/>
+          <a:p>
+            <a:pPr algn="ctr">
+              <a:buNone/>
+            </a:pPr>
+            <a:r>
+              <a:rPr lang="zh-CN" altLang="en-US" sz="6400" b="1" dirty="0">
+                <a:solidFill>
+                  <a:srgbClr val="000066"/>
+                </a:solidFill>
+                <a:latin typeface="微軟正黑體" pitchFamily="34" charset="-120"/>
+                <a:ea typeface="微軟正黑體" pitchFamily="34" charset="-120"/>
+              </a:rPr>
+              <a:t>今向主俯首敬拜</a:t>
+            </a:r>
+            <a:endParaRPr lang="en-US" altLang="zh-CN" sz="6400" b="1" dirty="0">
+              <a:solidFill>
+                <a:srgbClr val="000066"/>
+              </a:solidFill>
+              <a:latin typeface="微軟正黑體" pitchFamily="34" charset="-120"/>
+              <a:ea typeface="微軟正黑體" pitchFamily="34" charset="-120"/>
+            </a:endParaRPr>
+          </a:p>
+          <a:p>
+            <a:pPr algn="ctr">
+              <a:buNone/>
+            </a:pPr>
+            <a:r>
+              <a:rPr lang="zh-CN" altLang="en-US" sz="6400" b="1" dirty="0">
+                <a:solidFill>
+                  <a:srgbClr val="000066"/>
+                </a:solidFill>
+                <a:latin typeface="微軟正黑體" pitchFamily="34" charset="-120"/>
+                <a:ea typeface="微軟正黑體" pitchFamily="34" charset="-120"/>
+              </a:rPr>
+              <a:t>懇求主免我罪債</a:t>
+            </a:r>
+            <a:endParaRPr lang="zh-TW" altLang="en-US" sz="6400" b="1" dirty="0">
+              <a:solidFill>
+                <a:srgbClr val="000066"/>
+              </a:solidFill>
+              <a:latin typeface="微軟正黑體" pitchFamily="34" charset="-120"/>
+              <a:ea typeface="微軟正黑體" pitchFamily="34" charset="-120"/>
+            </a:endParaRPr>
+          </a:p>
+        </p:txBody>
+      </p:sp>
+    </p:spTree>
+    <p:extLst>
+      <p:ext uri="{BB962C8B-B14F-4D97-AF65-F5344CB8AC3E}">
+        <p14:creationId xmlns:p14="http://schemas.microsoft.com/office/powerpoint/2010/main" val="3148479494"/>
+      </p:ext>
+    </p:extLst>
   </p:cSld>
   <p:clrMapOvr>
     <a:masterClrMapping/>
@@ -3275,23 +4124,31 @@
       </p:grpSpPr>
       <p:sp>
         <p:nvSpPr>
-          <p:cNvPr id="4" name="標題 3"/>
-          <p:cNvSpPr>
-            <a:spLocks noGrp="1"/>
-          </p:cNvSpPr>
-          <p:nvPr>
-            <p:ph type="title"/>
-          </p:nvPr>
-        </p:nvSpPr>
-        <p:spPr/>
-        <p:txBody>
-          <a:bodyPr>
+          <p:cNvPr id="5" name="內容版面配置區 4"/>
+          <p:cNvSpPr>
+            <a:spLocks noGrp="1"/>
+          </p:cNvSpPr>
+          <p:nvPr>
+            <p:ph idx="1"/>
+          </p:nvPr>
+        </p:nvSpPr>
+        <p:spPr>
+          <a:xfrm>
+            <a:off x="0" y="2084851"/>
+            <a:ext cx="12192000" cy="2404863"/>
+          </a:xfrm>
+        </p:spPr>
+        <p:txBody>
+          <a:bodyPr anchor="ctr">
             <a:normAutofit/>
           </a:bodyPr>
           <a:lstStyle/>
           <a:p>
-            <a:r>
-              <a:rPr lang="zh-CN" altLang="en-US" sz="4800" b="1" dirty="0">
+            <a:pPr algn="ctr">
+              <a:buNone/>
+            </a:pPr>
+            <a:r>
+              <a:rPr lang="zh-CN" altLang="en-US" sz="6400" b="1" dirty="0">
                 <a:solidFill>
                   <a:srgbClr val="000066"/>
                 </a:solidFill>
@@ -3300,7 +4157,7 @@
               </a:rPr>
               <a:t>我今來就十字架</a:t>
             </a:r>
-            <a:endParaRPr lang="zh-TW" altLang="en-US" sz="4800" b="1" dirty="0">
+            <a:endParaRPr lang="en-US" altLang="zh-CN" sz="6400" b="1" dirty="0">
               <a:solidFill>
                 <a:srgbClr val="000066"/>
               </a:solidFill>
@@ -3308,39 +4165,21 @@
               <a:ea typeface="微軟正黑體" pitchFamily="34" charset="-120"/>
             </a:endParaRPr>
           </a:p>
-        </p:txBody>
-      </p:sp>
-      <p:sp>
-        <p:nvSpPr>
-          <p:cNvPr id="5" name="內容版面配置區 4"/>
-          <p:cNvSpPr>
-            <a:spLocks noGrp="1"/>
-          </p:cNvSpPr>
-          <p:nvPr>
-            <p:ph idx="1"/>
-          </p:nvPr>
-        </p:nvSpPr>
-        <p:spPr/>
-        <p:txBody>
-          <a:bodyPr>
-            <a:normAutofit/>
-          </a:bodyPr>
-          <a:lstStyle/>
           <a:p>
             <a:pPr algn="ctr">
               <a:buNone/>
             </a:pPr>
             <a:r>
-              <a:rPr lang="zh-CN" altLang="en-US" sz="5400" b="1" dirty="0">
+              <a:rPr lang="zh-CN" altLang="en-US" sz="6400" b="1" dirty="0">
                 <a:solidFill>
                   <a:srgbClr val="000066"/>
                 </a:solidFill>
                 <a:latin typeface="微軟正黑體" pitchFamily="34" charset="-120"/>
                 <a:ea typeface="微軟正黑體" pitchFamily="34" charset="-120"/>
               </a:rPr>
-              <a:t>我今靠救主鴻恩</a:t>
-            </a:r>
-            <a:endParaRPr lang="en-US" altLang="zh-CN" sz="5400" b="1" dirty="0">
+              <a:t>貧窮軟弱瞎心眼</a:t>
+            </a:r>
+            <a:endParaRPr lang="en-US" altLang="zh-CN" sz="6400" b="1" dirty="0">
               <a:solidFill>
                 <a:srgbClr val="000066"/>
               </a:solidFill>
@@ -3348,75 +4187,53 @@
               <a:ea typeface="微軟正黑體" pitchFamily="34" charset="-120"/>
             </a:endParaRPr>
           </a:p>
-          <a:p>
-            <a:pPr algn="ctr">
-              <a:buNone/>
-            </a:pPr>
-            <a:r>
-              <a:rPr lang="zh-CN" altLang="en-US" sz="5400" b="1" dirty="0">
+        </p:txBody>
+      </p:sp>
+      <p:sp>
+        <p:nvSpPr>
+          <p:cNvPr id="3" name="TextBox 2"/>
+          <p:cNvSpPr txBox="1"/>
+          <p:nvPr/>
+        </p:nvSpPr>
+        <p:spPr>
+          <a:xfrm>
+            <a:off x="0" y="5061181"/>
+            <a:ext cx="12192000" cy="666786"/>
+          </a:xfrm>
+          <a:prstGeom prst="rect">
+            <a:avLst/>
+          </a:prstGeom>
+          <a:noFill/>
+        </p:spPr>
+        <p:txBody>
+          <a:bodyPr wrap="square" rtlCol="0">
+            <a:spAutoFit/>
+          </a:bodyPr>
+          <a:lstStyle/>
+          <a:p>
+            <a:pPr algn="ctr"/>
+            <a:r>
+              <a:rPr lang="en-US" sz="3733" b="1" dirty="0">
                 <a:solidFill>
                   <a:srgbClr val="000066"/>
                 </a:solidFill>
-                <a:latin typeface="微軟正黑體" pitchFamily="34" charset="-120"/>
-                <a:ea typeface="微軟正黑體" pitchFamily="34" charset="-120"/>
               </a:rPr>
-              <a:t>因爲主可憐罪人</a:t>
-            </a:r>
-            <a:endParaRPr lang="en-US" altLang="zh-CN" sz="5400" b="1" dirty="0">
+              <a:t>( 1 / 4 )</a:t>
+            </a:r>
+            <a:endParaRPr lang="vi-VN" sz="3733" b="1" dirty="0">
               <a:solidFill>
                 <a:srgbClr val="000066"/>
               </a:solidFill>
-              <a:latin typeface="微軟正黑體" pitchFamily="34" charset="-120"/>
-              <a:ea typeface="微軟正黑體" pitchFamily="34" charset="-120"/>
             </a:endParaRPr>
           </a:p>
-          <a:p>
-            <a:pPr algn="ctr">
-              <a:buNone/>
-            </a:pPr>
-            <a:r>
-              <a:rPr lang="zh-CN" altLang="en-US" sz="5400" b="1" dirty="0">
-                <a:solidFill>
-                  <a:srgbClr val="000066"/>
-                </a:solidFill>
-                <a:latin typeface="微軟正黑體" pitchFamily="34" charset="-120"/>
-                <a:ea typeface="微軟正黑體" pitchFamily="34" charset="-120"/>
-              </a:rPr>
-              <a:t>今向主俯首敬拜</a:t>
-            </a:r>
-            <a:endParaRPr lang="en-US" altLang="zh-CN" sz="5400" b="1" dirty="0">
-              <a:solidFill>
-                <a:srgbClr val="000066"/>
-              </a:solidFill>
-              <a:latin typeface="微軟正黑體" pitchFamily="34" charset="-120"/>
-              <a:ea typeface="微軟正黑體" pitchFamily="34" charset="-120"/>
-            </a:endParaRPr>
-          </a:p>
-          <a:p>
-            <a:pPr algn="ctr">
-              <a:buNone/>
-            </a:pPr>
-            <a:r>
-              <a:rPr lang="zh-CN" altLang="en-US" sz="5400" b="1" dirty="0">
-                <a:solidFill>
-                  <a:srgbClr val="000066"/>
-                </a:solidFill>
-                <a:latin typeface="微軟正黑體" pitchFamily="34" charset="-120"/>
-                <a:ea typeface="微軟正黑體" pitchFamily="34" charset="-120"/>
-              </a:rPr>
-              <a:t>懇求主免我罪債</a:t>
-            </a:r>
-            <a:endParaRPr lang="zh-TW" altLang="en-US" sz="5400" b="1" dirty="0">
-              <a:solidFill>
-                <a:srgbClr val="000066"/>
-              </a:solidFill>
-              <a:latin typeface="微軟正黑體" pitchFamily="34" charset="-120"/>
-              <a:ea typeface="微軟正黑體" pitchFamily="34" charset="-120"/>
-            </a:endParaRPr>
-          </a:p>
         </p:txBody>
       </p:sp>
     </p:spTree>
+    <p:extLst>
+      <p:ext uri="{BB962C8B-B14F-4D97-AF65-F5344CB8AC3E}">
+        <p14:creationId xmlns:p14="http://schemas.microsoft.com/office/powerpoint/2010/main" val="3762601963"/>
+      </p:ext>
+    </p:extLst>
   </p:cSld>
   <p:clrMapOvr>
     <a:masterClrMapping/>
@@ -3443,32 +4260,40 @@
       </p:grpSpPr>
       <p:sp>
         <p:nvSpPr>
-          <p:cNvPr id="4" name="標題 3"/>
-          <p:cNvSpPr>
-            <a:spLocks noGrp="1"/>
-          </p:cNvSpPr>
-          <p:nvPr>
-            <p:ph type="title"/>
-          </p:nvPr>
-        </p:nvSpPr>
-        <p:spPr/>
-        <p:txBody>
-          <a:bodyPr>
+          <p:cNvPr id="5" name="內容版面配置區 4"/>
+          <p:cNvSpPr>
+            <a:spLocks noGrp="1"/>
+          </p:cNvSpPr>
+          <p:nvPr>
+            <p:ph idx="1"/>
+          </p:nvPr>
+        </p:nvSpPr>
+        <p:spPr>
+          <a:xfrm>
+            <a:off x="0" y="2084851"/>
+            <a:ext cx="12192000" cy="2404863"/>
+          </a:xfrm>
+        </p:spPr>
+        <p:txBody>
+          <a:bodyPr anchor="ctr">
             <a:normAutofit/>
           </a:bodyPr>
           <a:lstStyle/>
           <a:p>
-            <a:r>
-              <a:rPr lang="zh-CN" altLang="en-US" sz="4800" b="1" dirty="0">
+            <a:pPr algn="ctr">
+              <a:buNone/>
+            </a:pPr>
+            <a:r>
+              <a:rPr lang="zh-CN" altLang="en-US" sz="6400" b="1" dirty="0">
                 <a:solidFill>
                   <a:srgbClr val="000066"/>
                 </a:solidFill>
                 <a:latin typeface="微軟正黑體" pitchFamily="34" charset="-120"/>
                 <a:ea typeface="微軟正黑體" pitchFamily="34" charset="-120"/>
               </a:rPr>
-              <a:t>我今來就十字架</a:t>
-            </a:r>
-            <a:endParaRPr lang="zh-TW" altLang="en-US" sz="4800" b="1" dirty="0">
+              <a:t>看破萬物像土渣</a:t>
+            </a:r>
+            <a:endParaRPr lang="en-US" altLang="zh-CN" sz="6400" b="1" dirty="0">
               <a:solidFill>
                 <a:srgbClr val="000066"/>
               </a:solidFill>
@@ -3476,39 +4301,21 @@
               <a:ea typeface="微軟正黑體" pitchFamily="34" charset="-120"/>
             </a:endParaRPr>
           </a:p>
-        </p:txBody>
-      </p:sp>
-      <p:sp>
-        <p:nvSpPr>
-          <p:cNvPr id="5" name="內容版面配置區 4"/>
-          <p:cNvSpPr>
-            <a:spLocks noGrp="1"/>
-          </p:cNvSpPr>
-          <p:nvPr>
-            <p:ph idx="1"/>
-          </p:nvPr>
-        </p:nvSpPr>
-        <p:spPr/>
-        <p:txBody>
-          <a:bodyPr>
-            <a:normAutofit/>
-          </a:bodyPr>
-          <a:lstStyle/>
           <a:p>
             <a:pPr algn="ctr">
               <a:buNone/>
             </a:pPr>
             <a:r>
-              <a:rPr lang="zh-CN" altLang="en-US" sz="5400" b="1" dirty="0">
+              <a:rPr lang="zh-CN" altLang="en-US" sz="6400" b="1" dirty="0">
                 <a:solidFill>
                   <a:srgbClr val="000066"/>
                 </a:solidFill>
                 <a:latin typeface="微軟正黑體" pitchFamily="34" charset="-120"/>
                 <a:ea typeface="微軟正黑體" pitchFamily="34" charset="-120"/>
               </a:rPr>
-              <a:t>願我所有皆捨棄</a:t>
-            </a:r>
-            <a:endParaRPr lang="en-US" altLang="zh-CN" sz="5400" b="1" dirty="0">
+              <a:t>蒙救恩盡脫諸患</a:t>
+            </a:r>
+            <a:endParaRPr lang="zh-TW" altLang="en-US" sz="6400" b="1" dirty="0">
               <a:solidFill>
                 <a:srgbClr val="000066"/>
               </a:solidFill>
@@ -3516,84 +4323,18 @@
               <a:ea typeface="微軟正黑體" pitchFamily="34" charset="-120"/>
             </a:endParaRPr>
           </a:p>
-          <a:p>
-            <a:pPr algn="ctr">
-              <a:buNone/>
-            </a:pPr>
-            <a:r>
-              <a:rPr lang="zh-CN" altLang="en-US" sz="5400" b="1" dirty="0">
-                <a:solidFill>
-                  <a:srgbClr val="000066"/>
-                </a:solidFill>
-                <a:latin typeface="微軟正黑體" pitchFamily="34" charset="-120"/>
-                <a:ea typeface="微軟正黑體" pitchFamily="34" charset="-120"/>
-              </a:rPr>
-              <a:t>我光陰不敢虛度</a:t>
-            </a:r>
-            <a:endParaRPr lang="en-US" altLang="zh-CN" sz="5400" b="1" dirty="0">
-              <a:solidFill>
-                <a:srgbClr val="000066"/>
-              </a:solidFill>
-              <a:latin typeface="微軟正黑體" pitchFamily="34" charset="-120"/>
-              <a:ea typeface="微軟正黑體" pitchFamily="34" charset="-120"/>
-            </a:endParaRPr>
-          </a:p>
-          <a:p>
-            <a:pPr algn="ctr">
-              <a:buNone/>
-            </a:pPr>
-            <a:r>
-              <a:rPr lang="zh-CN" altLang="en-US" sz="5400" b="1" dirty="0">
-                <a:solidFill>
-                  <a:srgbClr val="000066"/>
-                </a:solidFill>
-                <a:latin typeface="微軟正黑體" pitchFamily="34" charset="-120"/>
-                <a:ea typeface="微軟正黑體" pitchFamily="34" charset="-120"/>
-              </a:rPr>
-              <a:t>獻全身心作活祭</a:t>
-            </a:r>
-            <a:endParaRPr lang="en-US" altLang="zh-CN" sz="5400" b="1" dirty="0">
-              <a:solidFill>
-                <a:srgbClr val="000066"/>
-              </a:solidFill>
-              <a:latin typeface="微軟正黑體" pitchFamily="34" charset="-120"/>
-              <a:ea typeface="微軟正黑體" pitchFamily="34" charset="-120"/>
-            </a:endParaRPr>
-          </a:p>
-          <a:p>
-            <a:pPr algn="ctr">
-              <a:buNone/>
-            </a:pPr>
-            <a:r>
-              <a:rPr lang="zh-CN" altLang="en-US" sz="5400" b="1" dirty="0">
-                <a:solidFill>
-                  <a:srgbClr val="000066"/>
-                </a:solidFill>
-                <a:latin typeface="微軟正黑體" pitchFamily="34" charset="-120"/>
-                <a:ea typeface="微軟正黑體" pitchFamily="34" charset="-120"/>
-              </a:rPr>
-              <a:t>自今日永遠歸主</a:t>
-            </a:r>
-            <a:endParaRPr lang="zh-TW" altLang="en-US" sz="5400" b="1" dirty="0">
-              <a:solidFill>
-                <a:srgbClr val="000066"/>
-              </a:solidFill>
-              <a:latin typeface="微軟正黑體" pitchFamily="34" charset="-120"/>
-              <a:ea typeface="微軟正黑體" pitchFamily="34" charset="-120"/>
-            </a:endParaRPr>
-          </a:p>
-        </p:txBody>
-      </p:sp>
-      <p:sp>
-        <p:nvSpPr>
-          <p:cNvPr id="6" name="TextBox 5"/>
+        </p:txBody>
+      </p:sp>
+      <p:sp>
+        <p:nvSpPr>
+          <p:cNvPr id="3" name="TextBox 2"/>
           <p:cNvSpPr txBox="1"/>
           <p:nvPr/>
         </p:nvSpPr>
         <p:spPr>
           <a:xfrm>
-            <a:off x="1703512" y="1700808"/>
-            <a:ext cx="792088" cy="923330"/>
+            <a:off x="0" y="5061181"/>
+            <a:ext cx="12192000" cy="666786"/>
           </a:xfrm>
           <a:prstGeom prst="rect">
             <a:avLst/>
@@ -3606,23 +4347,16 @@
           </a:bodyPr>
           <a:lstStyle/>
           <a:p>
-            <a:r>
-              <a:rPr lang="en-US" sz="5400" b="1" dirty="0">
+            <a:pPr algn="ctr"/>
+            <a:r>
+              <a:rPr lang="en-US" sz="3733" b="1" dirty="0">
                 <a:solidFill>
                   <a:srgbClr val="000066"/>
                 </a:solidFill>
               </a:rPr>
-              <a:t>2</a:t>
-            </a:r>
-            <a:r>
-              <a:rPr lang="en-US" sz="5400" b="1" dirty="0" smtClean="0">
-                <a:solidFill>
-                  <a:srgbClr val="000066"/>
-                </a:solidFill>
-              </a:rPr>
-              <a:t>.</a:t>
-            </a:r>
-            <a:endParaRPr lang="vi-VN" sz="5400" b="1" dirty="0">
+              <a:t>( 1 / 4 )</a:t>
+            </a:r>
+            <a:endParaRPr lang="vi-VN" sz="3733" b="1" dirty="0">
               <a:solidFill>
                 <a:srgbClr val="000066"/>
               </a:solidFill>
@@ -3631,6 +4365,11 @@
         </p:txBody>
       </p:sp>
     </p:spTree>
+    <p:extLst>
+      <p:ext uri="{BB962C8B-B14F-4D97-AF65-F5344CB8AC3E}">
+        <p14:creationId xmlns:p14="http://schemas.microsoft.com/office/powerpoint/2010/main" val="2892004538"/>
+      </p:ext>
+    </p:extLst>
   </p:cSld>
   <p:clrMapOvr>
     <a:masterClrMapping/>
@@ -3657,32 +4396,40 @@
       </p:grpSpPr>
       <p:sp>
         <p:nvSpPr>
-          <p:cNvPr id="4" name="標題 3"/>
-          <p:cNvSpPr>
-            <a:spLocks noGrp="1"/>
-          </p:cNvSpPr>
-          <p:nvPr>
-            <p:ph type="title"/>
-          </p:nvPr>
-        </p:nvSpPr>
-        <p:spPr/>
-        <p:txBody>
-          <a:bodyPr>
+          <p:cNvPr id="5" name="內容版面配置區 4"/>
+          <p:cNvSpPr>
+            <a:spLocks noGrp="1"/>
+          </p:cNvSpPr>
+          <p:nvPr>
+            <p:ph idx="1"/>
+          </p:nvPr>
+        </p:nvSpPr>
+        <p:spPr>
+          <a:xfrm>
+            <a:off x="0" y="2084851"/>
+            <a:ext cx="12192000" cy="2404863"/>
+          </a:xfrm>
+        </p:spPr>
+        <p:txBody>
+          <a:bodyPr anchor="ctr">
             <a:normAutofit/>
           </a:bodyPr>
           <a:lstStyle/>
           <a:p>
-            <a:r>
-              <a:rPr lang="zh-CN" altLang="en-US" sz="4800" b="1" dirty="0">
+            <a:pPr algn="ctr">
+              <a:buNone/>
+            </a:pPr>
+            <a:r>
+              <a:rPr lang="zh-CN" altLang="en-US" sz="6400" b="1" dirty="0">
                 <a:solidFill>
                   <a:srgbClr val="000066"/>
                 </a:solidFill>
                 <a:latin typeface="微軟正黑體" pitchFamily="34" charset="-120"/>
                 <a:ea typeface="微軟正黑體" pitchFamily="34" charset="-120"/>
               </a:rPr>
-              <a:t>我今來就十字架</a:t>
-            </a:r>
-            <a:endParaRPr lang="zh-TW" altLang="en-US" sz="4800" b="1" dirty="0">
+              <a:t>我今靠救主鴻恩</a:t>
+            </a:r>
+            <a:endParaRPr lang="en-US" altLang="zh-CN" sz="6400" b="1" dirty="0">
               <a:solidFill>
                 <a:srgbClr val="000066"/>
               </a:solidFill>
@@ -3690,39 +4437,21 @@
               <a:ea typeface="微軟正黑體" pitchFamily="34" charset="-120"/>
             </a:endParaRPr>
           </a:p>
-        </p:txBody>
-      </p:sp>
-      <p:sp>
-        <p:nvSpPr>
-          <p:cNvPr id="5" name="內容版面配置區 4"/>
-          <p:cNvSpPr>
-            <a:spLocks noGrp="1"/>
-          </p:cNvSpPr>
-          <p:nvPr>
-            <p:ph idx="1"/>
-          </p:nvPr>
-        </p:nvSpPr>
-        <p:spPr/>
-        <p:txBody>
-          <a:bodyPr>
-            <a:normAutofit/>
-          </a:bodyPr>
-          <a:lstStyle/>
           <a:p>
             <a:pPr algn="ctr">
               <a:buNone/>
             </a:pPr>
             <a:r>
-              <a:rPr lang="zh-CN" altLang="en-US" sz="5400" b="1" dirty="0">
+              <a:rPr lang="zh-CN" altLang="en-US" sz="6400" b="1" dirty="0">
                 <a:solidFill>
                   <a:srgbClr val="000066"/>
                 </a:solidFill>
                 <a:latin typeface="微軟正黑體" pitchFamily="34" charset="-120"/>
                 <a:ea typeface="微軟正黑體" pitchFamily="34" charset="-120"/>
               </a:rPr>
-              <a:t>我今靠救主鴻恩</a:t>
-            </a:r>
-            <a:endParaRPr lang="en-US" altLang="zh-CN" sz="5400" b="1" dirty="0">
+              <a:t>因爲主可憐罪人</a:t>
+            </a:r>
+            <a:endParaRPr lang="en-US" altLang="zh-CN" sz="6400" b="1" dirty="0">
               <a:solidFill>
                 <a:srgbClr val="000066"/>
               </a:solidFill>
@@ -3730,75 +4459,14 @@
               <a:ea typeface="微軟正黑體" pitchFamily="34" charset="-120"/>
             </a:endParaRPr>
           </a:p>
-          <a:p>
-            <a:pPr algn="ctr">
-              <a:buNone/>
-            </a:pPr>
-            <a:r>
-              <a:rPr lang="zh-CN" altLang="en-US" sz="5400" b="1" dirty="0">
-                <a:solidFill>
-                  <a:srgbClr val="000066"/>
-                </a:solidFill>
-                <a:latin typeface="微軟正黑體" pitchFamily="34" charset="-120"/>
-                <a:ea typeface="微軟正黑體" pitchFamily="34" charset="-120"/>
-              </a:rPr>
-              <a:t>因爲主可憐罪人</a:t>
-            </a:r>
-            <a:endParaRPr lang="en-US" altLang="zh-CN" sz="5400" b="1" dirty="0">
-              <a:solidFill>
-                <a:srgbClr val="000066"/>
-              </a:solidFill>
-              <a:latin typeface="微軟正黑體" pitchFamily="34" charset="-120"/>
-              <a:ea typeface="微軟正黑體" pitchFamily="34" charset="-120"/>
-            </a:endParaRPr>
-          </a:p>
-          <a:p>
-            <a:pPr algn="ctr">
-              <a:buNone/>
-            </a:pPr>
-            <a:r>
-              <a:rPr lang="zh-CN" altLang="en-US" sz="5400" b="1" dirty="0">
-                <a:solidFill>
-                  <a:srgbClr val="000066"/>
-                </a:solidFill>
-                <a:latin typeface="微軟正黑體" pitchFamily="34" charset="-120"/>
-                <a:ea typeface="微軟正黑體" pitchFamily="34" charset="-120"/>
-              </a:rPr>
-              <a:t>今向主俯首敬拜</a:t>
-            </a:r>
-            <a:endParaRPr lang="en-US" altLang="zh-CN" sz="5400" b="1" dirty="0">
-              <a:solidFill>
-                <a:srgbClr val="000066"/>
-              </a:solidFill>
-              <a:latin typeface="微軟正黑體" pitchFamily="34" charset="-120"/>
-              <a:ea typeface="微軟正黑體" pitchFamily="34" charset="-120"/>
-            </a:endParaRPr>
-          </a:p>
-          <a:p>
-            <a:pPr algn="ctr">
-              <a:buNone/>
-            </a:pPr>
-            <a:r>
-              <a:rPr lang="zh-CN" altLang="en-US" sz="5400" b="1" dirty="0">
-                <a:solidFill>
-                  <a:srgbClr val="000066"/>
-                </a:solidFill>
-                <a:latin typeface="微軟正黑體" pitchFamily="34" charset="-120"/>
-                <a:ea typeface="微軟正黑體" pitchFamily="34" charset="-120"/>
-              </a:rPr>
-              <a:t>懇求主免我罪債</a:t>
-            </a:r>
-            <a:endParaRPr lang="zh-TW" altLang="en-US" sz="5400" b="1" dirty="0">
-              <a:solidFill>
-                <a:srgbClr val="000066"/>
-              </a:solidFill>
-              <a:latin typeface="微軟正黑體" pitchFamily="34" charset="-120"/>
-              <a:ea typeface="微軟正黑體" pitchFamily="34" charset="-120"/>
-            </a:endParaRPr>
-          </a:p>
         </p:txBody>
       </p:sp>
     </p:spTree>
+    <p:extLst>
+      <p:ext uri="{BB962C8B-B14F-4D97-AF65-F5344CB8AC3E}">
+        <p14:creationId xmlns:p14="http://schemas.microsoft.com/office/powerpoint/2010/main" val="4070784083"/>
+      </p:ext>
+    </p:extLst>
   </p:cSld>
   <p:clrMapOvr>
     <a:masterClrMapping/>
@@ -3825,32 +4493,40 @@
       </p:grpSpPr>
       <p:sp>
         <p:nvSpPr>
-          <p:cNvPr id="4" name="標題 3"/>
-          <p:cNvSpPr>
-            <a:spLocks noGrp="1"/>
-          </p:cNvSpPr>
-          <p:nvPr>
-            <p:ph type="title"/>
-          </p:nvPr>
-        </p:nvSpPr>
-        <p:spPr/>
-        <p:txBody>
-          <a:bodyPr>
+          <p:cNvPr id="5" name="內容版面配置區 4"/>
+          <p:cNvSpPr>
+            <a:spLocks noGrp="1"/>
+          </p:cNvSpPr>
+          <p:nvPr>
+            <p:ph idx="1"/>
+          </p:nvPr>
+        </p:nvSpPr>
+        <p:spPr>
+          <a:xfrm>
+            <a:off x="0" y="2084851"/>
+            <a:ext cx="12192000" cy="2404863"/>
+          </a:xfrm>
+        </p:spPr>
+        <p:txBody>
+          <a:bodyPr anchor="ctr">
             <a:normAutofit/>
           </a:bodyPr>
           <a:lstStyle/>
           <a:p>
-            <a:r>
-              <a:rPr lang="zh-CN" altLang="en-US" sz="4800" b="1" dirty="0">
+            <a:pPr algn="ctr">
+              <a:buNone/>
+            </a:pPr>
+            <a:r>
+              <a:rPr lang="zh-CN" altLang="en-US" sz="6400" b="1" dirty="0">
                 <a:solidFill>
                   <a:srgbClr val="000066"/>
                 </a:solidFill>
                 <a:latin typeface="微軟正黑體" pitchFamily="34" charset="-120"/>
                 <a:ea typeface="微軟正黑體" pitchFamily="34" charset="-120"/>
               </a:rPr>
-              <a:t>我今來就十字架</a:t>
-            </a:r>
-            <a:endParaRPr lang="zh-TW" altLang="en-US" sz="4800" b="1" dirty="0">
+              <a:t>今向主俯首敬拜</a:t>
+            </a:r>
+            <a:endParaRPr lang="en-US" altLang="zh-CN" sz="6400" b="1" dirty="0">
               <a:solidFill>
                 <a:srgbClr val="000066"/>
               </a:solidFill>
@@ -3858,39 +4534,21 @@
               <a:ea typeface="微軟正黑體" pitchFamily="34" charset="-120"/>
             </a:endParaRPr>
           </a:p>
-        </p:txBody>
-      </p:sp>
-      <p:sp>
-        <p:nvSpPr>
-          <p:cNvPr id="5" name="內容版面配置區 4"/>
-          <p:cNvSpPr>
-            <a:spLocks noGrp="1"/>
-          </p:cNvSpPr>
-          <p:nvPr>
-            <p:ph idx="1"/>
-          </p:nvPr>
-        </p:nvSpPr>
-        <p:spPr/>
-        <p:txBody>
-          <a:bodyPr>
-            <a:normAutofit/>
-          </a:bodyPr>
-          <a:lstStyle/>
           <a:p>
             <a:pPr algn="ctr">
               <a:buNone/>
             </a:pPr>
             <a:r>
-              <a:rPr lang="zh-CN" altLang="en-US" sz="5400" b="1" dirty="0">
+              <a:rPr lang="zh-CN" altLang="en-US" sz="6400" b="1" dirty="0">
                 <a:solidFill>
                   <a:srgbClr val="000066"/>
                 </a:solidFill>
                 <a:latin typeface="微軟正黑體" pitchFamily="34" charset="-120"/>
                 <a:ea typeface="微軟正黑體" pitchFamily="34" charset="-120"/>
               </a:rPr>
-              <a:t>主應許是我所靠</a:t>
-            </a:r>
-            <a:endParaRPr lang="en-US" altLang="zh-CN" sz="5400" b="1" dirty="0">
+              <a:t>懇求主免我罪債</a:t>
+            </a:r>
+            <a:endParaRPr lang="zh-TW" altLang="en-US" sz="6400" b="1" dirty="0">
               <a:solidFill>
                 <a:srgbClr val="000066"/>
               </a:solidFill>
@@ -3898,121 +4556,14 @@
               <a:ea typeface="微軟正黑體" pitchFamily="34" charset="-120"/>
             </a:endParaRPr>
           </a:p>
-          <a:p>
-            <a:pPr algn="ctr">
-              <a:buNone/>
-            </a:pPr>
-            <a:r>
-              <a:rPr lang="zh-CN" altLang="en-US" sz="5400" b="1" dirty="0">
-                <a:solidFill>
-                  <a:srgbClr val="000066"/>
-                </a:solidFill>
-                <a:latin typeface="微軟正黑體" pitchFamily="34" charset="-120"/>
-                <a:ea typeface="微軟正黑體" pitchFamily="34" charset="-120"/>
-              </a:rPr>
-              <a:t>主寶血將心洗清</a:t>
-            </a:r>
-            <a:endParaRPr lang="en-US" altLang="zh-CN" sz="5400" b="1" dirty="0">
-              <a:solidFill>
-                <a:srgbClr val="000066"/>
-              </a:solidFill>
-              <a:latin typeface="微軟正黑體" pitchFamily="34" charset="-120"/>
-              <a:ea typeface="微軟正黑體" pitchFamily="34" charset="-120"/>
-            </a:endParaRPr>
-          </a:p>
-          <a:p>
-            <a:pPr algn="ctr">
-              <a:buNone/>
-            </a:pPr>
-            <a:r>
-              <a:rPr lang="zh-CN" altLang="en-US" sz="5400" b="1" dirty="0">
-                <a:solidFill>
-                  <a:srgbClr val="000066"/>
-                </a:solidFill>
-                <a:latin typeface="微軟正黑體" pitchFamily="34" charset="-120"/>
-                <a:ea typeface="微軟正黑體" pitchFamily="34" charset="-120"/>
-              </a:rPr>
-              <a:t>主足前我虔心禱</a:t>
-            </a:r>
-            <a:endParaRPr lang="en-US" altLang="zh-CN" sz="5400" b="1" dirty="0">
-              <a:solidFill>
-                <a:srgbClr val="000066"/>
-              </a:solidFill>
-              <a:latin typeface="微軟正黑體" pitchFamily="34" charset="-120"/>
-              <a:ea typeface="微軟正黑體" pitchFamily="34" charset="-120"/>
-            </a:endParaRPr>
-          </a:p>
-          <a:p>
-            <a:pPr algn="ctr">
-              <a:buNone/>
-            </a:pPr>
-            <a:r>
-              <a:rPr lang="zh-CN" altLang="en-US" sz="5400" b="1" dirty="0">
-                <a:solidFill>
-                  <a:srgbClr val="000066"/>
-                </a:solidFill>
-                <a:latin typeface="微軟正黑體" pitchFamily="34" charset="-120"/>
-                <a:ea typeface="微軟正黑體" pitchFamily="34" charset="-120"/>
-              </a:rPr>
-              <a:t>與基督十架同釘</a:t>
-            </a:r>
-            <a:endParaRPr lang="zh-TW" altLang="en-US" sz="5400" b="1" dirty="0">
-              <a:solidFill>
-                <a:srgbClr val="000066"/>
-              </a:solidFill>
-              <a:latin typeface="微軟正黑體" pitchFamily="34" charset="-120"/>
-              <a:ea typeface="微軟正黑體" pitchFamily="34" charset="-120"/>
-            </a:endParaRPr>
-          </a:p>
-        </p:txBody>
-      </p:sp>
-      <p:sp>
-        <p:nvSpPr>
-          <p:cNvPr id="6" name="TextBox 5"/>
-          <p:cNvSpPr txBox="1"/>
-          <p:nvPr/>
-        </p:nvSpPr>
-        <p:spPr>
-          <a:xfrm>
-            <a:off x="1703512" y="1700808"/>
-            <a:ext cx="792088" cy="923330"/>
-          </a:xfrm>
-          <a:prstGeom prst="rect">
-            <a:avLst/>
-          </a:prstGeom>
-          <a:noFill/>
-        </p:spPr>
-        <p:txBody>
-          <a:bodyPr wrap="square" rtlCol="0">
-            <a:spAutoFit/>
-          </a:bodyPr>
-          <a:lstStyle/>
-          <a:p>
-            <a:r>
-              <a:rPr lang="en-US" sz="5400" b="1" dirty="0">
-                <a:solidFill>
-                  <a:srgbClr val="000066"/>
-                </a:solidFill>
-              </a:rPr>
-              <a:t>3</a:t>
-            </a:r>
-            <a:r>
-              <a:rPr lang="en-US" sz="5400" b="1" dirty="0" smtClean="0">
-                <a:solidFill>
-                  <a:srgbClr val="000066"/>
-                </a:solidFill>
-              </a:rPr>
-              <a:t>.</a:t>
-            </a:r>
-            <a:endParaRPr lang="vi-VN" sz="5400" b="1" dirty="0">
-              <a:solidFill>
-                <a:srgbClr val="000066"/>
-              </a:solidFill>
-            </a:endParaRPr>
-          </a:p>
         </p:txBody>
       </p:sp>
     </p:spTree>
+    <p:extLst>
+      <p:ext uri="{BB962C8B-B14F-4D97-AF65-F5344CB8AC3E}">
+        <p14:creationId xmlns:p14="http://schemas.microsoft.com/office/powerpoint/2010/main" val="2450168858"/>
+      </p:ext>
+    </p:extLst>
   </p:cSld>
   <p:clrMapOvr>
     <a:masterClrMapping/>
@@ -4039,32 +4590,40 @@
       </p:grpSpPr>
       <p:sp>
         <p:nvSpPr>
-          <p:cNvPr id="4" name="標題 3"/>
-          <p:cNvSpPr>
-            <a:spLocks noGrp="1"/>
-          </p:cNvSpPr>
-          <p:nvPr>
-            <p:ph type="title"/>
-          </p:nvPr>
-        </p:nvSpPr>
-        <p:spPr/>
-        <p:txBody>
-          <a:bodyPr>
+          <p:cNvPr id="5" name="內容版面配置區 4"/>
+          <p:cNvSpPr>
+            <a:spLocks noGrp="1"/>
+          </p:cNvSpPr>
+          <p:nvPr>
+            <p:ph idx="1"/>
+          </p:nvPr>
+        </p:nvSpPr>
+        <p:spPr>
+          <a:xfrm>
+            <a:off x="0" y="2084851"/>
+            <a:ext cx="12192000" cy="2404863"/>
+          </a:xfrm>
+        </p:spPr>
+        <p:txBody>
+          <a:bodyPr anchor="ctr">
             <a:normAutofit/>
           </a:bodyPr>
           <a:lstStyle/>
           <a:p>
-            <a:r>
-              <a:rPr lang="zh-CN" altLang="en-US" sz="4800" b="1" dirty="0">
+            <a:pPr algn="ctr">
+              <a:buNone/>
+            </a:pPr>
+            <a:r>
+              <a:rPr lang="zh-CN" altLang="en-US" sz="6400" b="1" dirty="0">
                 <a:solidFill>
                   <a:srgbClr val="000066"/>
                 </a:solidFill>
                 <a:latin typeface="微軟正黑體" pitchFamily="34" charset="-120"/>
                 <a:ea typeface="微軟正黑體" pitchFamily="34" charset="-120"/>
               </a:rPr>
-              <a:t>我今來就十字架</a:t>
-            </a:r>
-            <a:endParaRPr lang="zh-TW" altLang="en-US" sz="4800" b="1" dirty="0">
+              <a:t>願我所有皆捨棄</a:t>
+            </a:r>
+            <a:endParaRPr lang="en-US" altLang="zh-CN" sz="6400" b="1" dirty="0">
               <a:solidFill>
                 <a:srgbClr val="000066"/>
               </a:solidFill>
@@ -4072,39 +4631,21 @@
               <a:ea typeface="微軟正黑體" pitchFamily="34" charset="-120"/>
             </a:endParaRPr>
           </a:p>
-        </p:txBody>
-      </p:sp>
-      <p:sp>
-        <p:nvSpPr>
-          <p:cNvPr id="5" name="內容版面配置區 4"/>
-          <p:cNvSpPr>
-            <a:spLocks noGrp="1"/>
-          </p:cNvSpPr>
-          <p:nvPr>
-            <p:ph idx="1"/>
-          </p:nvPr>
-        </p:nvSpPr>
-        <p:spPr/>
-        <p:txBody>
-          <a:bodyPr>
-            <a:normAutofit/>
-          </a:bodyPr>
-          <a:lstStyle/>
           <a:p>
             <a:pPr algn="ctr">
               <a:buNone/>
             </a:pPr>
             <a:r>
-              <a:rPr lang="zh-CN" altLang="en-US" sz="5400" b="1" dirty="0">
+              <a:rPr lang="zh-CN" altLang="en-US" sz="6400" b="1" dirty="0">
                 <a:solidFill>
                   <a:srgbClr val="000066"/>
                 </a:solidFill>
                 <a:latin typeface="微軟正黑體" pitchFamily="34" charset="-120"/>
                 <a:ea typeface="微軟正黑體" pitchFamily="34" charset="-120"/>
               </a:rPr>
-              <a:t>我今靠救主鴻恩</a:t>
-            </a:r>
-            <a:endParaRPr lang="en-US" altLang="zh-CN" sz="5400" b="1" dirty="0">
+              <a:t>我光陰不敢虛度</a:t>
+            </a:r>
+            <a:endParaRPr lang="en-US" altLang="zh-CN" sz="6400" b="1" dirty="0">
               <a:solidFill>
                 <a:srgbClr val="000066"/>
               </a:solidFill>
@@ -4112,75 +4653,53 @@
               <a:ea typeface="微軟正黑體" pitchFamily="34" charset="-120"/>
             </a:endParaRPr>
           </a:p>
-          <a:p>
-            <a:pPr algn="ctr">
-              <a:buNone/>
-            </a:pPr>
-            <a:r>
-              <a:rPr lang="zh-CN" altLang="en-US" sz="5400" b="1" dirty="0">
+        </p:txBody>
+      </p:sp>
+      <p:sp>
+        <p:nvSpPr>
+          <p:cNvPr id="3" name="TextBox 2"/>
+          <p:cNvSpPr txBox="1"/>
+          <p:nvPr/>
+        </p:nvSpPr>
+        <p:spPr>
+          <a:xfrm>
+            <a:off x="0" y="5061181"/>
+            <a:ext cx="12192000" cy="666786"/>
+          </a:xfrm>
+          <a:prstGeom prst="rect">
+            <a:avLst/>
+          </a:prstGeom>
+          <a:noFill/>
+        </p:spPr>
+        <p:txBody>
+          <a:bodyPr wrap="square" rtlCol="0">
+            <a:spAutoFit/>
+          </a:bodyPr>
+          <a:lstStyle/>
+          <a:p>
+            <a:pPr algn="ctr"/>
+            <a:r>
+              <a:rPr lang="en-US" sz="3733" b="1" dirty="0">
                 <a:solidFill>
                   <a:srgbClr val="000066"/>
                 </a:solidFill>
-                <a:latin typeface="微軟正黑體" pitchFamily="34" charset="-120"/>
-                <a:ea typeface="微軟正黑體" pitchFamily="34" charset="-120"/>
               </a:rPr>
-              <a:t>因爲主可憐罪人</a:t>
-            </a:r>
-            <a:endParaRPr lang="en-US" altLang="zh-CN" sz="5400" b="1" dirty="0">
+              <a:t>( 2 / 4 )</a:t>
+            </a:r>
+            <a:endParaRPr lang="vi-VN" sz="3733" b="1" dirty="0">
               <a:solidFill>
                 <a:srgbClr val="000066"/>
               </a:solidFill>
-              <a:latin typeface="微軟正黑體" pitchFamily="34" charset="-120"/>
-              <a:ea typeface="微軟正黑體" pitchFamily="34" charset="-120"/>
             </a:endParaRPr>
           </a:p>
-          <a:p>
-            <a:pPr algn="ctr">
-              <a:buNone/>
-            </a:pPr>
-            <a:r>
-              <a:rPr lang="zh-CN" altLang="en-US" sz="5400" b="1" dirty="0">
-                <a:solidFill>
-                  <a:srgbClr val="000066"/>
-                </a:solidFill>
-                <a:latin typeface="微軟正黑體" pitchFamily="34" charset="-120"/>
-                <a:ea typeface="微軟正黑體" pitchFamily="34" charset="-120"/>
-              </a:rPr>
-              <a:t>今向主俯首敬拜</a:t>
-            </a:r>
-            <a:endParaRPr lang="en-US" altLang="zh-CN" sz="5400" b="1" dirty="0">
-              <a:solidFill>
-                <a:srgbClr val="000066"/>
-              </a:solidFill>
-              <a:latin typeface="微軟正黑體" pitchFamily="34" charset="-120"/>
-              <a:ea typeface="微軟正黑體" pitchFamily="34" charset="-120"/>
-            </a:endParaRPr>
-          </a:p>
-          <a:p>
-            <a:pPr algn="ctr">
-              <a:buNone/>
-            </a:pPr>
-            <a:r>
-              <a:rPr lang="zh-CN" altLang="en-US" sz="5400" b="1" dirty="0">
-                <a:solidFill>
-                  <a:srgbClr val="000066"/>
-                </a:solidFill>
-                <a:latin typeface="微軟正黑體" pitchFamily="34" charset="-120"/>
-                <a:ea typeface="微軟正黑體" pitchFamily="34" charset="-120"/>
-              </a:rPr>
-              <a:t>懇求主免我罪債</a:t>
-            </a:r>
-            <a:endParaRPr lang="zh-TW" altLang="en-US" sz="5400" b="1" dirty="0">
-              <a:solidFill>
-                <a:srgbClr val="000066"/>
-              </a:solidFill>
-              <a:latin typeface="微軟正黑體" pitchFamily="34" charset="-120"/>
-              <a:ea typeface="微軟正黑體" pitchFamily="34" charset="-120"/>
-            </a:endParaRPr>
-          </a:p>
         </p:txBody>
       </p:sp>
     </p:spTree>
+    <p:extLst>
+      <p:ext uri="{BB962C8B-B14F-4D97-AF65-F5344CB8AC3E}">
+        <p14:creationId xmlns:p14="http://schemas.microsoft.com/office/powerpoint/2010/main" val="3779994751"/>
+      </p:ext>
+    </p:extLst>
   </p:cSld>
   <p:clrMapOvr>
     <a:masterClrMapping/>
@@ -4207,32 +4726,40 @@
       </p:grpSpPr>
       <p:sp>
         <p:nvSpPr>
-          <p:cNvPr id="4" name="標題 3"/>
-          <p:cNvSpPr>
-            <a:spLocks noGrp="1"/>
-          </p:cNvSpPr>
-          <p:nvPr>
-            <p:ph type="title"/>
-          </p:nvPr>
-        </p:nvSpPr>
-        <p:spPr/>
-        <p:txBody>
-          <a:bodyPr>
+          <p:cNvPr id="5" name="內容版面配置區 4"/>
+          <p:cNvSpPr>
+            <a:spLocks noGrp="1"/>
+          </p:cNvSpPr>
+          <p:nvPr>
+            <p:ph idx="1"/>
+          </p:nvPr>
+        </p:nvSpPr>
+        <p:spPr>
+          <a:xfrm>
+            <a:off x="0" y="2084851"/>
+            <a:ext cx="12192000" cy="2404863"/>
+          </a:xfrm>
+        </p:spPr>
+        <p:txBody>
+          <a:bodyPr anchor="ctr">
             <a:normAutofit/>
           </a:bodyPr>
           <a:lstStyle/>
           <a:p>
-            <a:r>
-              <a:rPr lang="zh-CN" altLang="en-US" sz="4800" b="1" dirty="0">
+            <a:pPr algn="ctr">
+              <a:buNone/>
+            </a:pPr>
+            <a:r>
+              <a:rPr lang="zh-CN" altLang="en-US" sz="6400" b="1" dirty="0">
                 <a:solidFill>
                   <a:srgbClr val="000066"/>
                 </a:solidFill>
                 <a:latin typeface="微軟正黑體" pitchFamily="34" charset="-120"/>
                 <a:ea typeface="微軟正黑體" pitchFamily="34" charset="-120"/>
               </a:rPr>
-              <a:t>我今來就十字架</a:t>
-            </a:r>
-            <a:endParaRPr lang="zh-TW" altLang="en-US" sz="4800" b="1" dirty="0">
+              <a:t>獻全身心作活祭</a:t>
+            </a:r>
+            <a:endParaRPr lang="en-US" altLang="zh-CN" sz="6400" b="1" dirty="0">
               <a:solidFill>
                 <a:srgbClr val="000066"/>
               </a:solidFill>
@@ -4240,39 +4767,21 @@
               <a:ea typeface="微軟正黑體" pitchFamily="34" charset="-120"/>
             </a:endParaRPr>
           </a:p>
-        </p:txBody>
-      </p:sp>
-      <p:sp>
-        <p:nvSpPr>
-          <p:cNvPr id="5" name="內容版面配置區 4"/>
-          <p:cNvSpPr>
-            <a:spLocks noGrp="1"/>
-          </p:cNvSpPr>
-          <p:nvPr>
-            <p:ph idx="1"/>
-          </p:nvPr>
-        </p:nvSpPr>
-        <p:spPr/>
-        <p:txBody>
-          <a:bodyPr>
-            <a:normAutofit/>
-          </a:bodyPr>
-          <a:lstStyle/>
           <a:p>
             <a:pPr algn="ctr">
               <a:buNone/>
             </a:pPr>
             <a:r>
-              <a:rPr lang="zh-CN" altLang="en-US" sz="5400" b="1" dirty="0">
+              <a:rPr lang="zh-CN" altLang="en-US" sz="6400" b="1" dirty="0">
                 <a:solidFill>
                   <a:srgbClr val="000066"/>
                 </a:solidFill>
                 <a:latin typeface="微軟正黑體" pitchFamily="34" charset="-120"/>
                 <a:ea typeface="微軟正黑體" pitchFamily="34" charset="-120"/>
               </a:rPr>
-              <a:t>求主靈充滿我心</a:t>
-            </a:r>
-            <a:endParaRPr lang="en-US" altLang="zh-CN" sz="5400" b="1" dirty="0">
+              <a:t>自今日永遠歸主</a:t>
+            </a:r>
+            <a:endParaRPr lang="zh-TW" altLang="en-US" sz="6400" b="1" dirty="0">
               <a:solidFill>
                 <a:srgbClr val="000066"/>
               </a:solidFill>
@@ -4280,84 +4789,18 @@
               <a:ea typeface="微軟正黑體" pitchFamily="34" charset="-120"/>
             </a:endParaRPr>
           </a:p>
-          <a:p>
-            <a:pPr algn="ctr">
-              <a:buNone/>
-            </a:pPr>
-            <a:r>
-              <a:rPr lang="zh-CN" altLang="en-US" sz="5400" b="1" dirty="0">
-                <a:solidFill>
-                  <a:srgbClr val="000066"/>
-                </a:solidFill>
-                <a:latin typeface="微軟正黑體" pitchFamily="34" charset="-120"/>
-                <a:ea typeface="微軟正黑體" pitchFamily="34" charset="-120"/>
-              </a:rPr>
-              <a:t>使生活快樂歡暢</a:t>
-            </a:r>
-            <a:endParaRPr lang="en-US" altLang="zh-CN" sz="5400" b="1" dirty="0">
-              <a:solidFill>
-                <a:srgbClr val="000066"/>
-              </a:solidFill>
-              <a:latin typeface="微軟正黑體" pitchFamily="34" charset="-120"/>
-              <a:ea typeface="微軟正黑體" pitchFamily="34" charset="-120"/>
-            </a:endParaRPr>
-          </a:p>
-          <a:p>
-            <a:pPr algn="ctr">
-              <a:buNone/>
-            </a:pPr>
-            <a:r>
-              <a:rPr lang="zh-CN" altLang="en-US" sz="5400" b="1" dirty="0">
-                <a:solidFill>
-                  <a:srgbClr val="000066"/>
-                </a:solidFill>
-                <a:latin typeface="微軟正黑體" pitchFamily="34" charset="-120"/>
-                <a:ea typeface="微軟正黑體" pitchFamily="34" charset="-120"/>
-              </a:rPr>
-              <a:t>諸罪債主已還清</a:t>
-            </a:r>
-            <a:endParaRPr lang="en-US" altLang="zh-CN" sz="5400" b="1" dirty="0">
-              <a:solidFill>
-                <a:srgbClr val="000066"/>
-              </a:solidFill>
-              <a:latin typeface="微軟正黑體" pitchFamily="34" charset="-120"/>
-              <a:ea typeface="微軟正黑體" pitchFamily="34" charset="-120"/>
-            </a:endParaRPr>
-          </a:p>
-          <a:p>
-            <a:pPr algn="ctr">
-              <a:buNone/>
-            </a:pPr>
-            <a:r>
-              <a:rPr lang="zh-CN" altLang="en-US" sz="5400" b="1" dirty="0">
-                <a:solidFill>
-                  <a:srgbClr val="000066"/>
-                </a:solidFill>
-                <a:latin typeface="微軟正黑體" pitchFamily="34" charset="-120"/>
-                <a:ea typeface="微軟正黑體" pitchFamily="34" charset="-120"/>
-              </a:rPr>
-              <a:t>大榮耀歸與羔羊</a:t>
-            </a:r>
-            <a:endParaRPr lang="zh-TW" altLang="en-US" sz="5400" b="1" dirty="0">
-              <a:solidFill>
-                <a:srgbClr val="000066"/>
-              </a:solidFill>
-              <a:latin typeface="微軟正黑體" pitchFamily="34" charset="-120"/>
-              <a:ea typeface="微軟正黑體" pitchFamily="34" charset="-120"/>
-            </a:endParaRPr>
-          </a:p>
-        </p:txBody>
-      </p:sp>
-      <p:sp>
-        <p:nvSpPr>
-          <p:cNvPr id="6" name="TextBox 5"/>
+        </p:txBody>
+      </p:sp>
+      <p:sp>
+        <p:nvSpPr>
+          <p:cNvPr id="3" name="TextBox 2"/>
           <p:cNvSpPr txBox="1"/>
           <p:nvPr/>
         </p:nvSpPr>
         <p:spPr>
           <a:xfrm>
-            <a:off x="1703512" y="1700808"/>
-            <a:ext cx="792088" cy="923330"/>
+            <a:off x="0" y="5061181"/>
+            <a:ext cx="12192000" cy="666786"/>
           </a:xfrm>
           <a:prstGeom prst="rect">
             <a:avLst/>
@@ -4370,23 +4813,16 @@
           </a:bodyPr>
           <a:lstStyle/>
           <a:p>
-            <a:r>
-              <a:rPr lang="en-US" sz="5400" b="1" dirty="0">
+            <a:pPr algn="ctr"/>
+            <a:r>
+              <a:rPr lang="en-US" sz="3733" b="1" dirty="0">
                 <a:solidFill>
                   <a:srgbClr val="000066"/>
                 </a:solidFill>
               </a:rPr>
-              <a:t>4</a:t>
-            </a:r>
-            <a:r>
-              <a:rPr lang="en-US" sz="5400" b="1" dirty="0" smtClean="0">
-                <a:solidFill>
-                  <a:srgbClr val="000066"/>
-                </a:solidFill>
-              </a:rPr>
-              <a:t>.</a:t>
-            </a:r>
-            <a:endParaRPr lang="vi-VN" sz="5400" b="1" dirty="0">
+              <a:t>( 2 / 4 )</a:t>
+            </a:r>
+            <a:endParaRPr lang="vi-VN" sz="3733" b="1" dirty="0">
               <a:solidFill>
                 <a:srgbClr val="000066"/>
               </a:solidFill>
@@ -4395,6 +4831,11 @@
         </p:txBody>
       </p:sp>
     </p:spTree>
+    <p:extLst>
+      <p:ext uri="{BB962C8B-B14F-4D97-AF65-F5344CB8AC3E}">
+        <p14:creationId xmlns:p14="http://schemas.microsoft.com/office/powerpoint/2010/main" val="3306713836"/>
+      </p:ext>
+    </p:extLst>
   </p:cSld>
   <p:clrMapOvr>
     <a:masterClrMapping/>
@@ -4421,32 +4862,40 @@
       </p:grpSpPr>
       <p:sp>
         <p:nvSpPr>
-          <p:cNvPr id="4" name="標題 3"/>
-          <p:cNvSpPr>
-            <a:spLocks noGrp="1"/>
-          </p:cNvSpPr>
-          <p:nvPr>
-            <p:ph type="title"/>
-          </p:nvPr>
-        </p:nvSpPr>
-        <p:spPr/>
-        <p:txBody>
-          <a:bodyPr>
+          <p:cNvPr id="5" name="內容版面配置區 4"/>
+          <p:cNvSpPr>
+            <a:spLocks noGrp="1"/>
+          </p:cNvSpPr>
+          <p:nvPr>
+            <p:ph idx="1"/>
+          </p:nvPr>
+        </p:nvSpPr>
+        <p:spPr>
+          <a:xfrm>
+            <a:off x="0" y="2084851"/>
+            <a:ext cx="12192000" cy="2404863"/>
+          </a:xfrm>
+        </p:spPr>
+        <p:txBody>
+          <a:bodyPr anchor="ctr">
             <a:normAutofit/>
           </a:bodyPr>
           <a:lstStyle/>
           <a:p>
-            <a:r>
-              <a:rPr lang="zh-CN" altLang="en-US" sz="4800" b="1" dirty="0">
+            <a:pPr algn="ctr">
+              <a:buNone/>
+            </a:pPr>
+            <a:r>
+              <a:rPr lang="zh-CN" altLang="en-US" sz="6400" b="1" dirty="0">
                 <a:solidFill>
                   <a:srgbClr val="000066"/>
                 </a:solidFill>
                 <a:latin typeface="微軟正黑體" pitchFamily="34" charset="-120"/>
                 <a:ea typeface="微軟正黑體" pitchFamily="34" charset="-120"/>
               </a:rPr>
-              <a:t>我今來就十字架</a:t>
-            </a:r>
-            <a:endParaRPr lang="zh-TW" altLang="en-US" sz="4800" b="1" dirty="0">
+              <a:t>我今靠救主鴻恩</a:t>
+            </a:r>
+            <a:endParaRPr lang="en-US" altLang="zh-CN" sz="6400" b="1" dirty="0">
               <a:solidFill>
                 <a:srgbClr val="000066"/>
               </a:solidFill>
@@ -4454,39 +4903,21 @@
               <a:ea typeface="微軟正黑體" pitchFamily="34" charset="-120"/>
             </a:endParaRPr>
           </a:p>
-        </p:txBody>
-      </p:sp>
-      <p:sp>
-        <p:nvSpPr>
-          <p:cNvPr id="5" name="內容版面配置區 4"/>
-          <p:cNvSpPr>
-            <a:spLocks noGrp="1"/>
-          </p:cNvSpPr>
-          <p:nvPr>
-            <p:ph idx="1"/>
-          </p:nvPr>
-        </p:nvSpPr>
-        <p:spPr/>
-        <p:txBody>
-          <a:bodyPr>
-            <a:normAutofit/>
-          </a:bodyPr>
-          <a:lstStyle/>
           <a:p>
             <a:pPr algn="ctr">
               <a:buNone/>
             </a:pPr>
             <a:r>
-              <a:rPr lang="zh-CN" altLang="en-US" sz="5400" b="1" dirty="0">
+              <a:rPr lang="zh-CN" altLang="en-US" sz="6400" b="1" dirty="0">
                 <a:solidFill>
                   <a:srgbClr val="000066"/>
                 </a:solidFill>
                 <a:latin typeface="微軟正黑體" pitchFamily="34" charset="-120"/>
                 <a:ea typeface="微軟正黑體" pitchFamily="34" charset="-120"/>
               </a:rPr>
-              <a:t>我今靠救主鴻恩</a:t>
-            </a:r>
-            <a:endParaRPr lang="en-US" altLang="zh-CN" sz="5400" b="1" dirty="0">
+              <a:t>因爲主可憐罪人</a:t>
+            </a:r>
+            <a:endParaRPr lang="en-US" altLang="zh-CN" sz="6400" b="1" dirty="0">
               <a:solidFill>
                 <a:srgbClr val="000066"/>
               </a:solidFill>
@@ -4494,21 +4925,74 @@
               <a:ea typeface="微軟正黑體" pitchFamily="34" charset="-120"/>
             </a:endParaRPr>
           </a:p>
+        </p:txBody>
+      </p:sp>
+    </p:spTree>
+    <p:extLst>
+      <p:ext uri="{BB962C8B-B14F-4D97-AF65-F5344CB8AC3E}">
+        <p14:creationId xmlns:p14="http://schemas.microsoft.com/office/powerpoint/2010/main" val="2532945722"/>
+      </p:ext>
+    </p:extLst>
+  </p:cSld>
+  <p:clrMapOvr>
+    <a:masterClrMapping/>
+  </p:clrMapOvr>
+</p:sld>
+</file>
+
+<file path=ppt/slides/slide9.xml><?xml version="1.0" encoding="utf-8"?>
+<p:sld xmlns:a="http://schemas.openxmlformats.org/drawingml/2006/main" xmlns:r="http://schemas.openxmlformats.org/officeDocument/2006/relationships" xmlns:p="http://schemas.openxmlformats.org/presentationml/2006/main">
+  <p:cSld>
+    <p:spTree>
+      <p:nvGrpSpPr>
+        <p:cNvPr id="1" name=""/>
+        <p:cNvGrpSpPr/>
+        <p:nvPr/>
+      </p:nvGrpSpPr>
+      <p:grpSpPr>
+        <a:xfrm>
+          <a:off x="0" y="0"/>
+          <a:ext cx="0" cy="0"/>
+          <a:chOff x="0" y="0"/>
+          <a:chExt cx="0" cy="0"/>
+        </a:xfrm>
+      </p:grpSpPr>
+      <p:sp>
+        <p:nvSpPr>
+          <p:cNvPr id="5" name="內容版面配置區 4"/>
+          <p:cNvSpPr>
+            <a:spLocks noGrp="1"/>
+          </p:cNvSpPr>
+          <p:nvPr>
+            <p:ph idx="1"/>
+          </p:nvPr>
+        </p:nvSpPr>
+        <p:spPr>
+          <a:xfrm>
+            <a:off x="0" y="2084851"/>
+            <a:ext cx="12192000" cy="2404863"/>
+          </a:xfrm>
+        </p:spPr>
+        <p:txBody>
+          <a:bodyPr anchor="ctr">
+            <a:normAutofit/>
+          </a:bodyPr>
+          <a:lstStyle/>
           <a:p>
             <a:pPr algn="ctr">
               <a:buNone/>
             </a:pPr>
             <a:r>
-              <a:rPr lang="zh-CN" altLang="en-US" sz="5400" b="1" dirty="0">
+              <a:rPr lang="zh-CN" altLang="en-US" sz="6400" b="1" dirty="0">
                 <a:solidFill>
                   <a:srgbClr val="000066"/>
                 </a:solidFill>
                 <a:latin typeface="微軟正黑體" pitchFamily="34" charset="-120"/>
                 <a:ea typeface="微軟正黑體" pitchFamily="34" charset="-120"/>
               </a:rPr>
-              <a:t>因爲主可憐罪人</a:t>
-            </a:r>
-            <a:endParaRPr lang="en-US" altLang="zh-CN" sz="5400" b="1" dirty="0">
+              <a:t>今向主俯首敬拜</a:t>
+            </a:r>
+            <a:endParaRPr lang="en-US" altLang="zh-CN" sz="6400" b="1" dirty="0">
               <a:solidFill>
                 <a:srgbClr val="000066"/>
               </a:solidFill>
@@ -4521,16 +5005,16 @@
               <a:buNone/>
             </a:pPr>
             <a:r>
-              <a:rPr lang="zh-CN" altLang="en-US" sz="5400" b="1" dirty="0">
+              <a:rPr lang="zh-CN" altLang="en-US" sz="6400" b="1" dirty="0">
                 <a:solidFill>
                   <a:srgbClr val="000066"/>
                 </a:solidFill>
                 <a:latin typeface="微軟正黑體" pitchFamily="34" charset="-120"/>
                 <a:ea typeface="微軟正黑體" pitchFamily="34" charset="-120"/>
               </a:rPr>
-              <a:t>今向主俯首敬拜</a:t>
-            </a:r>
-            <a:endParaRPr lang="en-US" altLang="zh-CN" sz="5400" b="1" dirty="0">
+              <a:t>懇求主免我罪債</a:t>
+            </a:r>
+            <a:endParaRPr lang="zh-TW" altLang="en-US" sz="6400" b="1" dirty="0">
               <a:solidFill>
                 <a:srgbClr val="000066"/>
               </a:solidFill>
@@ -4538,31 +5022,14 @@
               <a:ea typeface="微軟正黑體" pitchFamily="34" charset="-120"/>
             </a:endParaRPr>
           </a:p>
-          <a:p>
-            <a:pPr algn="ctr">
-              <a:buNone/>
-            </a:pPr>
-            <a:r>
-              <a:rPr lang="zh-CN" altLang="en-US" sz="5400" b="1" dirty="0">
-                <a:solidFill>
-                  <a:srgbClr val="000066"/>
-                </a:solidFill>
-                <a:latin typeface="微軟正黑體" pitchFamily="34" charset="-120"/>
-                <a:ea typeface="微軟正黑體" pitchFamily="34" charset="-120"/>
-              </a:rPr>
-              <a:t>懇求主免我罪債</a:t>
-            </a:r>
-            <a:endParaRPr lang="zh-TW" altLang="en-US" sz="5400" b="1" dirty="0">
-              <a:solidFill>
-                <a:srgbClr val="000066"/>
-              </a:solidFill>
-              <a:latin typeface="微軟正黑體" pitchFamily="34" charset="-120"/>
-              <a:ea typeface="微軟正黑體" pitchFamily="34" charset="-120"/>
-            </a:endParaRPr>
-          </a:p>
         </p:txBody>
       </p:sp>
     </p:spTree>
+    <p:extLst>
+      <p:ext uri="{BB962C8B-B14F-4D97-AF65-F5344CB8AC3E}">
+        <p14:creationId xmlns:p14="http://schemas.microsoft.com/office/powerpoint/2010/main" val="2661916778"/>
+      </p:ext>
+    </p:extLst>
   </p:cSld>
   <p:clrMapOvr>
     <a:masterClrMapping/>
